--- a/Gaia Upsell Machine Presentation for Hackathon - updated by Alex.pptx
+++ b/Gaia Upsell Machine Presentation for Hackathon - updated by Alex.pptx
@@ -15,6 +15,11 @@
     <p:sldId id="259" r:id="rId10"/>
     <p:sldId id="260" r:id="rId11"/>
     <p:sldId id="261" r:id="rId12"/>
+    <p:sldId id="262" r:id="rId13"/>
+    <p:sldId id="263" r:id="rId14"/>
+    <p:sldId id="264" r:id="rId15"/>
+    <p:sldId id="265" r:id="rId16"/>
+    <p:sldId id="266" r:id="rId17"/>
   </p:sldIdLst>
   <p:sldSz cy="5143500" cx="9144000"/>
   <p:notesSz cx="6858000" cy="9144000"/>
@@ -264,6 +269,298 @@
     </p:ext>
   </p:extLst>
 </p:presentation>
+</file>
+
+<file path=ppt/charts/chart1.xml><?xml version="1.0" encoding="utf-8"?>
+<c:chartSpace xmlns:c="http://schemas.openxmlformats.org/drawingml/2006/chart" xmlns:a="http://schemas.openxmlformats.org/drawingml/2006/main" xmlns:r="http://schemas.openxmlformats.org/officeDocument/2006/relationships">
+  <c:date1904 val="0"/>
+  <c:chart>
+    <c:autoTitleDeleted val="1"/>
+    <c:plotArea>
+      <c:barChart>
+        <c:barDir val="col"/>
+        <c:grouping val="clustered"/>
+        <c:ser>
+          <c:idx val="0"/>
+          <c:order val="0"/>
+          <c:tx>
+            <c:strRef>
+              <c:f>Sheet1!$B$1</c:f>
+              <c:strCache>
+                <c:ptCount val="1"/>
+                <c:pt idx="0">
+                  <c:v>Manual today</c:v>
+                </c:pt>
+              </c:strCache>
+            </c:strRef>
+          </c:tx>
+          <c:spPr>
+            <a:solidFill>
+              <a:srgbClr val="5D5A72"/>
+            </a:solidFill>
+          </c:spPr>
+          <c:dLbls>
+            <c:txPr>
+              <a:bodyPr/>
+              <a:lstStyle/>
+              <a:p>
+                <a:pPr>
+                  <a:defRPr sz="800">
+                    <a:solidFill>
+                      <a:srgbClr val="1C153E"/>
+                    </a:solidFill>
+                    <a:latin typeface="Calibri"/>
+                  </a:defRPr>
+                </a:pPr>
+              </a:p>
+            </c:txPr>
+            <c:dLblPos val="outEnd"/>
+            <c:showLegendKey val="0"/>
+            <c:showVal val="1"/>
+            <c:showCatName val="0"/>
+            <c:showSerName val="0"/>
+            <c:showPercent val="0"/>
+            <c:showBubbleSize val="0"/>
+            <c:showLeaderLines val="1"/>
+          </c:dLbls>
+          <c:cat>
+            <c:strRef>
+              <c:f>Sheet1!$A$2:$A$4</c:f>
+              <c:strCache>
+                <c:ptCount val="3"/>
+                <c:pt idx="0">
+                  <c:v>Find the trigger</c:v>
+                </c:pt>
+                <c:pt idx="1">
+                  <c:v>Draft outreach</c:v>
+                </c:pt>
+                <c:pt idx="2">
+                  <c:v>Review account</c:v>
+                </c:pt>
+              </c:strCache>
+            </c:strRef>
+          </c:cat>
+          <c:val>
+            <c:numRef>
+              <c:f>Sheet1!$B$2:$B$4</c:f>
+              <c:numCache>
+                <c:formatCode>General</c:formatCode>
+                <c:ptCount val="3"/>
+                <c:pt idx="0">
+                  <c:v>117</c:v>
+                </c:pt>
+                <c:pt idx="1">
+                  <c:v>52</c:v>
+                </c:pt>
+                <c:pt idx="2">
+                  <c:v>26</c:v>
+                </c:pt>
+              </c:numCache>
+            </c:numRef>
+          </c:val>
+        </c:ser>
+        <c:ser>
+          <c:idx val="1"/>
+          <c:order val="1"/>
+          <c:tx>
+            <c:strRef>
+              <c:f>Sheet1!$C$1</c:f>
+              <c:strCache>
+                <c:ptCount val="1"/>
+                <c:pt idx="0">
+                  <c:v>With Gaia</c:v>
+                </c:pt>
+              </c:strCache>
+            </c:strRef>
+          </c:tx>
+          <c:spPr>
+            <a:solidFill>
+              <a:srgbClr val="5422FF"/>
+            </a:solidFill>
+          </c:spPr>
+          <c:dLbls>
+            <c:txPr>
+              <a:bodyPr/>
+              <a:lstStyle/>
+              <a:p>
+                <a:pPr>
+                  <a:defRPr sz="800">
+                    <a:solidFill>
+                      <a:srgbClr val="1C153E"/>
+                    </a:solidFill>
+                    <a:latin typeface="Calibri"/>
+                  </a:defRPr>
+                </a:pPr>
+              </a:p>
+            </c:txPr>
+            <c:dLblPos val="outEnd"/>
+            <c:showLegendKey val="0"/>
+            <c:showVal val="1"/>
+            <c:showCatName val="0"/>
+            <c:showSerName val="0"/>
+            <c:showPercent val="0"/>
+            <c:showBubbleSize val="0"/>
+            <c:showLeaderLines val="1"/>
+          </c:dLbls>
+          <c:cat>
+            <c:strRef>
+              <c:f>Sheet1!$A$2:$A$4</c:f>
+              <c:strCache>
+                <c:ptCount val="3"/>
+                <c:pt idx="0">
+                  <c:v>Find the trigger</c:v>
+                </c:pt>
+                <c:pt idx="1">
+                  <c:v>Draft outreach</c:v>
+                </c:pt>
+                <c:pt idx="2">
+                  <c:v>Review account</c:v>
+                </c:pt>
+              </c:strCache>
+            </c:strRef>
+          </c:cat>
+          <c:val>
+            <c:numRef>
+              <c:f>Sheet1!$C$2:$C$4</c:f>
+              <c:numCache>
+                <c:formatCode>General</c:formatCode>
+                <c:ptCount val="3"/>
+                <c:pt idx="0">
+                  <c:v>0</c:v>
+                </c:pt>
+                <c:pt idx="1">
+                  <c:v>13</c:v>
+                </c:pt>
+                <c:pt idx="2">
+                  <c:v>13</c:v>
+                </c:pt>
+              </c:numCache>
+            </c:numRef>
+          </c:val>
+        </c:ser>
+        <c:axId val="-2068027336"/>
+        <c:axId val="-2113994440"/>
+      </c:barChart>
+      <c:catAx>
+        <c:axId val="-2068027336"/>
+        <c:scaling>
+          <c:orientation val="minMax"/>
+        </c:scaling>
+        <c:delete val="0"/>
+        <c:axPos val="b"/>
+        <c:majorTickMark val="out"/>
+        <c:minorTickMark val="none"/>
+        <c:tickLblPos val="nextTo"/>
+        <c:txPr>
+          <a:bodyPr/>
+          <a:lstStyle/>
+          <a:p>
+            <a:pPr>
+              <a:defRPr sz="850">
+                <a:solidFill>
+                  <a:srgbClr val="5D5A72"/>
+                </a:solidFill>
+                <a:latin typeface="Calibri"/>
+              </a:defRPr>
+            </a:pPr>
+          </a:p>
+        </c:txPr>
+        <c:crossAx val="-2113994440"/>
+        <c:crosses val="autoZero"/>
+        <c:auto val="1"/>
+        <c:lblAlgn val="ctr"/>
+        <c:lblOffset val="100"/>
+        <c:noMultiLvlLbl val="0"/>
+      </c:catAx>
+      <c:valAx>
+        <c:axId val="-2113994440"/>
+        <c:scaling/>
+        <c:delete val="0"/>
+        <c:axPos val="l"/>
+        <c:majorGridlines>
+          <c:spPr>
+            <a:ln>
+              <a:solidFill>
+                <a:srgbClr val="E8E4F7"/>
+              </a:solidFill>
+            </a:ln>
+          </c:spPr>
+        </c:majorGridlines>
+        <c:title>
+          <c:tx>
+            <c:rich>
+              <a:bodyPr/>
+              <a:lstStyle/>
+              <a:p>
+                <a:r>
+                  <a:rPr sz="850">
+                    <a:solidFill>
+                      <a:srgbClr val="5D5A72"/>
+                    </a:solidFill>
+                    <a:latin typeface="Calibri"/>
+                  </a:rPr>
+                  <a:t>minutes</a:t>
+                </a:r>
+              </a:p>
+            </c:rich>
+          </c:tx>
+          <c:layout/>
+          <c:overlay val="0"/>
+        </c:title>
+        <c:majorTickMark val="out"/>
+        <c:minorTickMark val="none"/>
+        <c:tickLblPos val="nextTo"/>
+        <c:txPr>
+          <a:bodyPr/>
+          <a:lstStyle/>
+          <a:p>
+            <a:pPr>
+              <a:defRPr sz="850">
+                <a:solidFill>
+                  <a:srgbClr val="5D5A72"/>
+                </a:solidFill>
+                <a:latin typeface="Calibri"/>
+              </a:defRPr>
+            </a:pPr>
+          </a:p>
+        </c:txPr>
+        <c:crossAx val="-2068027336"/>
+        <c:crosses val="autoZero"/>
+      </c:valAx>
+    </c:plotArea>
+    <c:legend>
+      <c:overlay val="0"/>
+      <c:txPr>
+        <a:bodyPr/>
+        <a:lstStyle/>
+        <a:p>
+          <a:pPr>
+            <a:defRPr sz="900">
+              <a:solidFill>
+                <a:srgbClr val="5D5A72"/>
+              </a:solidFill>
+              <a:latin typeface="Calibri"/>
+            </a:defRPr>
+          </a:pPr>
+        </a:p>
+      </c:txPr>
+    </c:legend>
+    <c:dispBlanksAs val="gap"/>
+  </c:chart>
+  <c:txPr>
+    <a:bodyPr/>
+    <a:lstStyle/>
+    <a:p>
+      <a:pPr>
+        <a:defRPr sz="1800"/>
+      </a:pPr>
+      <a:endParaRPr lang="en-US"/>
+    </a:p>
+  </c:txPr>
+  <c:externalData r:id="rId1">
+    <c:autoUpdate val="0"/>
+  </c:externalData>
+</c:chartSpace>
 </file>
 
 <file path=ppt/notesMasters/notesMaster1.xml><?xml version="1.0" encoding="utf-8"?>
@@ -15948,6 +16245,2191 @@
 </p:sld>
 </file>
 
+<file path=ppt/slides/slide10.xml><?xml version="1.0" encoding="utf-8"?>
+<p:sld xmlns:a="http://schemas.openxmlformats.org/drawingml/2006/main" xmlns:p="http://schemas.openxmlformats.org/presentationml/2006/main" xmlns:r="http://schemas.openxmlformats.org/officeDocument/2006/relationships">
+  <p:cSld>
+    <p:spTree>
+      <p:nvGrpSpPr>
+        <p:cNvPr id="1" name=""/>
+        <p:cNvGrpSpPr/>
+        <p:nvPr/>
+      </p:nvGrpSpPr>
+      <p:grpSpPr/>
+      <p:sp>
+        <p:nvSpPr>
+          <p:cNvPr id="2" name="Rectangle 1"/>
+          <p:cNvSpPr/>
+          <p:nvPr/>
+        </p:nvSpPr>
+        <p:spPr>
+          <a:xfrm>
+            <a:off x="0" y="0"/>
+            <a:ext cx="9144000" cy="5138928"/>
+          </a:xfrm>
+          <a:prstGeom prst="rect">
+            <a:avLst/>
+          </a:prstGeom>
+          <a:solidFill>
+            <a:srgbClr val="FFFFFF"/>
+          </a:solidFill>
+          <a:ln>
+            <a:noFill/>
+          </a:ln>
+          <a:effectLst/>
+        </p:spPr>
+        <p:style>
+          <a:lnRef idx="1">
+            <a:schemeClr val="accent1"/>
+          </a:lnRef>
+          <a:fillRef idx="3">
+            <a:schemeClr val="accent1"/>
+          </a:fillRef>
+          <a:effectRef idx="2">
+            <a:schemeClr val="accent1"/>
+          </a:effectRef>
+          <a:fontRef idx="minor">
+            <a:schemeClr val="lt1"/>
+          </a:fontRef>
+        </p:style>
+        <p:txBody>
+          <a:bodyPr rtlCol="0" anchor="ctr"/>
+          <a:lstStyle/>
+          <a:p>
+            <a:pPr algn="ctr"/>
+          </a:p>
+        </p:txBody>
+      </p:sp>
+      <p:sp>
+        <p:nvSpPr>
+          <p:cNvPr id="3" name="Rectangle 2"/>
+          <p:cNvSpPr/>
+          <p:nvPr/>
+        </p:nvSpPr>
+        <p:spPr>
+          <a:xfrm>
+            <a:off x="411480" y="374904"/>
+            <a:ext cx="64008" cy="219456"/>
+          </a:xfrm>
+          <a:prstGeom prst="rect">
+            <a:avLst/>
+          </a:prstGeom>
+          <a:solidFill>
+            <a:srgbClr val="5422FF"/>
+          </a:solidFill>
+          <a:ln>
+            <a:noFill/>
+          </a:ln>
+          <a:effectLst/>
+        </p:spPr>
+        <p:style>
+          <a:lnRef idx="1">
+            <a:schemeClr val="accent1"/>
+          </a:lnRef>
+          <a:fillRef idx="3">
+            <a:schemeClr val="accent1"/>
+          </a:fillRef>
+          <a:effectRef idx="2">
+            <a:schemeClr val="accent1"/>
+          </a:effectRef>
+          <a:fontRef idx="minor">
+            <a:schemeClr val="lt1"/>
+          </a:fontRef>
+        </p:style>
+        <p:txBody>
+          <a:bodyPr rtlCol="0" anchor="ctr"/>
+          <a:lstStyle/>
+          <a:p>
+            <a:pPr algn="ctr"/>
+          </a:p>
+        </p:txBody>
+      </p:sp>
+      <p:sp>
+        <p:nvSpPr>
+          <p:cNvPr id="4" name="TextBox 3"/>
+          <p:cNvSpPr txBox="1"/>
+          <p:nvPr/>
+        </p:nvSpPr>
+        <p:spPr>
+          <a:xfrm>
+            <a:off x="566928" y="329184"/>
+            <a:ext cx="4114800" cy="274320"/>
+          </a:xfrm>
+          <a:prstGeom prst="rect">
+            <a:avLst/>
+          </a:prstGeom>
+          <a:noFill/>
+        </p:spPr>
+        <p:txBody>
+          <a:bodyPr wrap="square" lIns="0" rIns="0" tIns="0" bIns="0" anchor="t">
+            <a:spAutoFit/>
+          </a:bodyPr>
+          <a:lstStyle/>
+          <a:p>
+            <a:pPr algn="l"/>
+            <a:r>
+              <a:rPr sz="1250" b="1">
+                <a:solidFill>
+                  <a:srgbClr val="5422FF"/>
+                </a:solidFill>
+                <a:latin typeface="Calibri"/>
+              </a:rPr>
+              <a:t>CRITERION 4 — TOKEN EFFICIENCY</a:t>
+            </a:r>
+          </a:p>
+        </p:txBody>
+      </p:sp>
+      <p:sp>
+        <p:nvSpPr>
+          <p:cNvPr id="5" name="TextBox 4"/>
+          <p:cNvSpPr txBox="1"/>
+          <p:nvPr/>
+        </p:nvSpPr>
+        <p:spPr>
+          <a:xfrm>
+            <a:off x="411480" y="621792"/>
+            <a:ext cx="7891272" cy="484632"/>
+          </a:xfrm>
+          <a:prstGeom prst="rect">
+            <a:avLst/>
+          </a:prstGeom>
+          <a:noFill/>
+        </p:spPr>
+        <p:txBody>
+          <a:bodyPr wrap="square" lIns="0" rIns="0" tIns="0" bIns="0" anchor="t">
+            <a:spAutoFit/>
+          </a:bodyPr>
+          <a:lstStyle/>
+          <a:p>
+            <a:pPr algn="l"/>
+            <a:r>
+              <a:rPr sz="2900" b="1">
+                <a:solidFill>
+                  <a:srgbClr val="1C153E"/>
+                </a:solidFill>
+                <a:latin typeface="Calibri"/>
+              </a:rPr>
+              <a:t>Survey cheaply, then drill selectively</a:t>
+            </a:r>
+          </a:p>
+        </p:txBody>
+      </p:sp>
+      <p:sp>
+        <p:nvSpPr>
+          <p:cNvPr id="6" name="TextBox 5"/>
+          <p:cNvSpPr txBox="1"/>
+          <p:nvPr/>
+        </p:nvSpPr>
+        <p:spPr>
+          <a:xfrm>
+            <a:off x="411480" y="1060704"/>
+            <a:ext cx="7818120" cy="347472"/>
+          </a:xfrm>
+          <a:prstGeom prst="rect">
+            <a:avLst/>
+          </a:prstGeom>
+          <a:noFill/>
+        </p:spPr>
+        <p:txBody>
+          <a:bodyPr wrap="square" lIns="0" rIns="0" tIns="0" bIns="0" anchor="t">
+            <a:spAutoFit/>
+          </a:bodyPr>
+          <a:lstStyle/>
+          <a:p>
+            <a:pPr algn="l"/>
+            <a:r>
+              <a:rPr sz="1400" b="0">
+                <a:solidFill>
+                  <a:srgbClr val="5D5A72"/>
+                </a:solidFill>
+                <a:latin typeface="Calibri"/>
+              </a:rPr>
+              <a:t>Token cost is measured through the API and reported in the response, not estimated.</a:t>
+            </a:r>
+          </a:p>
+        </p:txBody>
+      </p:sp>
+      <p:sp>
+        <p:nvSpPr>
+          <p:cNvPr id="7" name="TextBox 6"/>
+          <p:cNvSpPr txBox="1"/>
+          <p:nvPr/>
+        </p:nvSpPr>
+        <p:spPr>
+          <a:xfrm>
+            <a:off x="411480" y="4855464"/>
+            <a:ext cx="4114800" cy="210312"/>
+          </a:xfrm>
+          <a:prstGeom prst="rect">
+            <a:avLst/>
+          </a:prstGeom>
+          <a:noFill/>
+        </p:spPr>
+        <p:txBody>
+          <a:bodyPr wrap="square" lIns="0" rIns="0" tIns="0" bIns="0" anchor="t">
+            <a:spAutoFit/>
+          </a:bodyPr>
+          <a:lstStyle/>
+          <a:p>
+            <a:pPr algn="l"/>
+            <a:r>
+              <a:rPr sz="1000" b="0">
+                <a:solidFill>
+                  <a:srgbClr val="5D5A72"/>
+                </a:solidFill>
+                <a:latin typeface="Calibri"/>
+              </a:rPr>
+              <a:t>Gaia ARR Growth Agent</a:t>
+            </a:r>
+          </a:p>
+        </p:txBody>
+      </p:sp>
+      <p:sp>
+        <p:nvSpPr>
+          <p:cNvPr id="8" name="TextBox 7"/>
+          <p:cNvSpPr txBox="1"/>
+          <p:nvPr/>
+        </p:nvSpPr>
+        <p:spPr>
+          <a:xfrm>
+            <a:off x="8229600" y="4855464"/>
+            <a:ext cx="484632" cy="210312"/>
+          </a:xfrm>
+          <a:prstGeom prst="rect">
+            <a:avLst/>
+          </a:prstGeom>
+          <a:noFill/>
+        </p:spPr>
+        <p:txBody>
+          <a:bodyPr wrap="square" lIns="0" rIns="0" tIns="0" bIns="0" anchor="t">
+            <a:spAutoFit/>
+          </a:bodyPr>
+          <a:lstStyle/>
+          <a:p>
+            <a:pPr algn="l"/>
+            <a:r>
+              <a:rPr sz="1000" b="0">
+                <a:solidFill>
+                  <a:srgbClr val="5D5A72"/>
+                </a:solidFill>
+                <a:latin typeface="Calibri"/>
+              </a:rPr>
+              <a:t>10</a:t>
+            </a:r>
+          </a:p>
+        </p:txBody>
+      </p:sp>
+      <p:sp>
+        <p:nvSpPr>
+          <p:cNvPr id="9" name="Rectangle 8"/>
+          <p:cNvSpPr/>
+          <p:nvPr/>
+        </p:nvSpPr>
+        <p:spPr>
+          <a:xfrm>
+            <a:off x="411480" y="1554480"/>
+            <a:ext cx="1872234" cy="960120"/>
+          </a:xfrm>
+          <a:prstGeom prst="rect">
+            <a:avLst/>
+          </a:prstGeom>
+          <a:solidFill>
+            <a:srgbClr val="F7F5FF"/>
+          </a:solidFill>
+          <a:ln>
+            <a:noFill/>
+          </a:ln>
+          <a:effectLst/>
+        </p:spPr>
+        <p:style>
+          <a:lnRef idx="1">
+            <a:schemeClr val="accent1"/>
+          </a:lnRef>
+          <a:fillRef idx="3">
+            <a:schemeClr val="accent1"/>
+          </a:fillRef>
+          <a:effectRef idx="2">
+            <a:schemeClr val="accent1"/>
+          </a:effectRef>
+          <a:fontRef idx="minor">
+            <a:schemeClr val="lt1"/>
+          </a:fontRef>
+        </p:style>
+        <p:txBody>
+          <a:bodyPr rtlCol="0" anchor="ctr"/>
+          <a:lstStyle/>
+          <a:p>
+            <a:pPr algn="ctr"/>
+          </a:p>
+        </p:txBody>
+      </p:sp>
+      <p:sp>
+        <p:nvSpPr>
+          <p:cNvPr id="10" name="TextBox 9"/>
+          <p:cNvSpPr txBox="1"/>
+          <p:nvPr/>
+        </p:nvSpPr>
+        <p:spPr>
+          <a:xfrm>
+            <a:off x="539496" y="1673352"/>
+            <a:ext cx="1616201" cy="438912"/>
+          </a:xfrm>
+          <a:prstGeom prst="rect">
+            <a:avLst/>
+          </a:prstGeom>
+          <a:noFill/>
+        </p:spPr>
+        <p:txBody>
+          <a:bodyPr wrap="square" lIns="0" rIns="0" tIns="0" bIns="0" anchor="t">
+            <a:spAutoFit/>
+          </a:bodyPr>
+          <a:lstStyle/>
+          <a:p>
+            <a:pPr algn="l"/>
+            <a:r>
+              <a:rPr sz="2600" b="1">
+                <a:solidFill>
+                  <a:srgbClr val="5422FF"/>
+                </a:solidFill>
+                <a:latin typeface="Calibri"/>
+              </a:rPr>
+              <a:t>~4.4k</a:t>
+            </a:r>
+          </a:p>
+        </p:txBody>
+      </p:sp>
+      <p:sp>
+        <p:nvSpPr>
+          <p:cNvPr id="11" name="TextBox 10"/>
+          <p:cNvSpPr txBox="1"/>
+          <p:nvPr/>
+        </p:nvSpPr>
+        <p:spPr>
+          <a:xfrm>
+            <a:off x="539496" y="2121408"/>
+            <a:ext cx="1616201" cy="329184"/>
+          </a:xfrm>
+          <a:prstGeom prst="rect">
+            <a:avLst/>
+          </a:prstGeom>
+          <a:noFill/>
+        </p:spPr>
+        <p:txBody>
+          <a:bodyPr wrap="square" lIns="0" rIns="0" tIns="0" bIns="0" anchor="t">
+            <a:spAutoFit/>
+          </a:bodyPr>
+          <a:lstStyle/>
+          <a:p>
+            <a:pPr algn="l"/>
+            <a:r>
+              <a:rPr sz="950" b="0">
+                <a:solidFill>
+                  <a:srgbClr val="5D5A72"/>
+                </a:solidFill>
+                <a:latin typeface="Calibri"/>
+              </a:rPr>
+              <a:t>tokens per portfolio question</a:t>
+            </a:r>
+          </a:p>
+        </p:txBody>
+      </p:sp>
+      <p:sp>
+        <p:nvSpPr>
+          <p:cNvPr id="12" name="Rectangle 11"/>
+          <p:cNvSpPr/>
+          <p:nvPr/>
+        </p:nvSpPr>
+        <p:spPr>
+          <a:xfrm>
+            <a:off x="2439162" y="1554480"/>
+            <a:ext cx="1872234" cy="960120"/>
+          </a:xfrm>
+          <a:prstGeom prst="rect">
+            <a:avLst/>
+          </a:prstGeom>
+          <a:solidFill>
+            <a:srgbClr val="F7F5FF"/>
+          </a:solidFill>
+          <a:ln>
+            <a:noFill/>
+          </a:ln>
+          <a:effectLst/>
+        </p:spPr>
+        <p:style>
+          <a:lnRef idx="1">
+            <a:schemeClr val="accent1"/>
+          </a:lnRef>
+          <a:fillRef idx="3">
+            <a:schemeClr val="accent1"/>
+          </a:fillRef>
+          <a:effectRef idx="2">
+            <a:schemeClr val="accent1"/>
+          </a:effectRef>
+          <a:fontRef idx="minor">
+            <a:schemeClr val="lt1"/>
+          </a:fontRef>
+        </p:style>
+        <p:txBody>
+          <a:bodyPr rtlCol="0" anchor="ctr"/>
+          <a:lstStyle/>
+          <a:p>
+            <a:pPr algn="ctr"/>
+          </a:p>
+        </p:txBody>
+      </p:sp>
+      <p:sp>
+        <p:nvSpPr>
+          <p:cNvPr id="13" name="TextBox 12"/>
+          <p:cNvSpPr txBox="1"/>
+          <p:nvPr/>
+        </p:nvSpPr>
+        <p:spPr>
+          <a:xfrm>
+            <a:off x="2567178" y="1673352"/>
+            <a:ext cx="1616201" cy="438912"/>
+          </a:xfrm>
+          <a:prstGeom prst="rect">
+            <a:avLst/>
+          </a:prstGeom>
+          <a:noFill/>
+        </p:spPr>
+        <p:txBody>
+          <a:bodyPr wrap="square" lIns="0" rIns="0" tIns="0" bIns="0" anchor="t">
+            <a:spAutoFit/>
+          </a:bodyPr>
+          <a:lstStyle/>
+          <a:p>
+            <a:pPr algn="l"/>
+            <a:r>
+              <a:rPr sz="2600" b="1">
+                <a:solidFill>
+                  <a:srgbClr val="158A5E"/>
+                </a:solidFill>
+                <a:latin typeface="Calibri"/>
+              </a:rPr>
+              <a:t>~5.2k</a:t>
+            </a:r>
+          </a:p>
+        </p:txBody>
+      </p:sp>
+      <p:sp>
+        <p:nvSpPr>
+          <p:cNvPr id="14" name="TextBox 13"/>
+          <p:cNvSpPr txBox="1"/>
+          <p:nvPr/>
+        </p:nvSpPr>
+        <p:spPr>
+          <a:xfrm>
+            <a:off x="2567178" y="2121408"/>
+            <a:ext cx="1616201" cy="329184"/>
+          </a:xfrm>
+          <a:prstGeom prst="rect">
+            <a:avLst/>
+          </a:prstGeom>
+          <a:noFill/>
+        </p:spPr>
+        <p:txBody>
+          <a:bodyPr wrap="square" lIns="0" rIns="0" tIns="0" bIns="0" anchor="t">
+            <a:spAutoFit/>
+          </a:bodyPr>
+          <a:lstStyle/>
+          <a:p>
+            <a:pPr algn="l"/>
+            <a:r>
+              <a:rPr sz="950" b="0">
+                <a:solidFill>
+                  <a:srgbClr val="5D5A72"/>
+                </a:solidFill>
+                <a:latin typeface="Calibri"/>
+              </a:rPr>
+              <a:t>tokens per daily briefing</a:t>
+            </a:r>
+          </a:p>
+        </p:txBody>
+      </p:sp>
+      <p:sp>
+        <p:nvSpPr>
+          <p:cNvPr id="15" name="Rectangle 14"/>
+          <p:cNvSpPr/>
+          <p:nvPr/>
+        </p:nvSpPr>
+        <p:spPr>
+          <a:xfrm>
+            <a:off x="4466844" y="1554480"/>
+            <a:ext cx="1872234" cy="960120"/>
+          </a:xfrm>
+          <a:prstGeom prst="rect">
+            <a:avLst/>
+          </a:prstGeom>
+          <a:solidFill>
+            <a:srgbClr val="F7F5FF"/>
+          </a:solidFill>
+          <a:ln>
+            <a:noFill/>
+          </a:ln>
+          <a:effectLst/>
+        </p:spPr>
+        <p:style>
+          <a:lnRef idx="1">
+            <a:schemeClr val="accent1"/>
+          </a:lnRef>
+          <a:fillRef idx="3">
+            <a:schemeClr val="accent1"/>
+          </a:fillRef>
+          <a:effectRef idx="2">
+            <a:schemeClr val="accent1"/>
+          </a:effectRef>
+          <a:fontRef idx="minor">
+            <a:schemeClr val="lt1"/>
+          </a:fontRef>
+        </p:style>
+        <p:txBody>
+          <a:bodyPr rtlCol="0" anchor="ctr"/>
+          <a:lstStyle/>
+          <a:p>
+            <a:pPr algn="ctr"/>
+          </a:p>
+        </p:txBody>
+      </p:sp>
+      <p:sp>
+        <p:nvSpPr>
+          <p:cNvPr id="16" name="TextBox 15"/>
+          <p:cNvSpPr txBox="1"/>
+          <p:nvPr/>
+        </p:nvSpPr>
+        <p:spPr>
+          <a:xfrm>
+            <a:off x="4594859" y="1673352"/>
+            <a:ext cx="1616201" cy="438912"/>
+          </a:xfrm>
+          <a:prstGeom prst="rect">
+            <a:avLst/>
+          </a:prstGeom>
+          <a:noFill/>
+        </p:spPr>
+        <p:txBody>
+          <a:bodyPr wrap="square" lIns="0" rIns="0" tIns="0" bIns="0" anchor="t">
+            <a:spAutoFit/>
+          </a:bodyPr>
+          <a:lstStyle/>
+          <a:p>
+            <a:pPr algn="l"/>
+            <a:r>
+              <a:rPr sz="2600" b="1">
+                <a:solidFill>
+                  <a:srgbClr val="D98E2B"/>
+                </a:solidFill>
+                <a:latin typeface="Calibri"/>
+              </a:rPr>
+              <a:t>4</a:t>
+            </a:r>
+          </a:p>
+        </p:txBody>
+      </p:sp>
+      <p:sp>
+        <p:nvSpPr>
+          <p:cNvPr id="17" name="TextBox 16"/>
+          <p:cNvSpPr txBox="1"/>
+          <p:nvPr/>
+        </p:nvSpPr>
+        <p:spPr>
+          <a:xfrm>
+            <a:off x="4594859" y="2121408"/>
+            <a:ext cx="1616201" cy="329184"/>
+          </a:xfrm>
+          <a:prstGeom prst="rect">
+            <a:avLst/>
+          </a:prstGeom>
+          <a:noFill/>
+        </p:spPr>
+        <p:txBody>
+          <a:bodyPr wrap="square" lIns="0" rIns="0" tIns="0" bIns="0" anchor="t">
+            <a:spAutoFit/>
+          </a:bodyPr>
+          <a:lstStyle/>
+          <a:p>
+            <a:pPr algn="l"/>
+            <a:r>
+              <a:rPr sz="950" b="0">
+                <a:solidFill>
+                  <a:srgbClr val="5D5A72"/>
+                </a:solidFill>
+                <a:latin typeface="Calibri"/>
+              </a:rPr>
+              <a:t>tools, each returning a minimal shape</a:t>
+            </a:r>
+          </a:p>
+        </p:txBody>
+      </p:sp>
+      <p:sp>
+        <p:nvSpPr>
+          <p:cNvPr id="18" name="Rectangle 17"/>
+          <p:cNvSpPr/>
+          <p:nvPr/>
+        </p:nvSpPr>
+        <p:spPr>
+          <a:xfrm>
+            <a:off x="6494526" y="1554480"/>
+            <a:ext cx="1872234" cy="960120"/>
+          </a:xfrm>
+          <a:prstGeom prst="rect">
+            <a:avLst/>
+          </a:prstGeom>
+          <a:solidFill>
+            <a:srgbClr val="F7F5FF"/>
+          </a:solidFill>
+          <a:ln>
+            <a:noFill/>
+          </a:ln>
+          <a:effectLst/>
+        </p:spPr>
+        <p:style>
+          <a:lnRef idx="1">
+            <a:schemeClr val="accent1"/>
+          </a:lnRef>
+          <a:fillRef idx="3">
+            <a:schemeClr val="accent1"/>
+          </a:fillRef>
+          <a:effectRef idx="2">
+            <a:schemeClr val="accent1"/>
+          </a:effectRef>
+          <a:fontRef idx="minor">
+            <a:schemeClr val="lt1"/>
+          </a:fontRef>
+        </p:style>
+        <p:txBody>
+          <a:bodyPr rtlCol="0" anchor="ctr"/>
+          <a:lstStyle/>
+          <a:p>
+            <a:pPr algn="ctr"/>
+          </a:p>
+        </p:txBody>
+      </p:sp>
+      <p:sp>
+        <p:nvSpPr>
+          <p:cNvPr id="19" name="TextBox 18"/>
+          <p:cNvSpPr txBox="1"/>
+          <p:nvPr/>
+        </p:nvSpPr>
+        <p:spPr>
+          <a:xfrm>
+            <a:off x="6622542" y="1673352"/>
+            <a:ext cx="1616201" cy="438912"/>
+          </a:xfrm>
+          <a:prstGeom prst="rect">
+            <a:avLst/>
+          </a:prstGeom>
+          <a:noFill/>
+        </p:spPr>
+        <p:txBody>
+          <a:bodyPr wrap="square" lIns="0" rIns="0" tIns="0" bIns="0" anchor="t">
+            <a:spAutoFit/>
+          </a:bodyPr>
+          <a:lstStyle/>
+          <a:p>
+            <a:pPr algn="l"/>
+            <a:r>
+              <a:rPr sz="2600" b="1">
+                <a:solidFill>
+                  <a:srgbClr val="1C153E"/>
+                </a:solidFill>
+                <a:latin typeface="Calibri"/>
+              </a:rPr>
+              <a:t>gpt-4o-mini</a:t>
+            </a:r>
+          </a:p>
+        </p:txBody>
+      </p:sp>
+      <p:sp>
+        <p:nvSpPr>
+          <p:cNvPr id="20" name="TextBox 19"/>
+          <p:cNvSpPr txBox="1"/>
+          <p:nvPr/>
+        </p:nvSpPr>
+        <p:spPr>
+          <a:xfrm>
+            <a:off x="6622542" y="2121408"/>
+            <a:ext cx="1616201" cy="329184"/>
+          </a:xfrm>
+          <a:prstGeom prst="rect">
+            <a:avLst/>
+          </a:prstGeom>
+          <a:noFill/>
+        </p:spPr>
+        <p:txBody>
+          <a:bodyPr wrap="square" lIns="0" rIns="0" tIns="0" bIns="0" anchor="t">
+            <a:spAutoFit/>
+          </a:bodyPr>
+          <a:lstStyle/>
+          <a:p>
+            <a:pPr algn="l"/>
+            <a:r>
+              <a:rPr sz="950" b="0">
+                <a:solidFill>
+                  <a:srgbClr val="5D5A72"/>
+                </a:solidFill>
+                <a:latin typeface="Calibri"/>
+              </a:rPr>
+              <a:t>low-cost model, no frontier spend</a:t>
+            </a:r>
+          </a:p>
+        </p:txBody>
+      </p:sp>
+      <p:sp>
+        <p:nvSpPr>
+          <p:cNvPr id="21" name="Rectangle 20"/>
+          <p:cNvSpPr/>
+          <p:nvPr/>
+        </p:nvSpPr>
+        <p:spPr>
+          <a:xfrm>
+            <a:off x="411480" y="2743200"/>
+            <a:ext cx="7955279" cy="566928"/>
+          </a:xfrm>
+          <a:prstGeom prst="rect">
+            <a:avLst/>
+          </a:prstGeom>
+          <a:solidFill>
+            <a:srgbClr val="F7F5FF"/>
+          </a:solidFill>
+          <a:ln>
+            <a:noFill/>
+          </a:ln>
+          <a:effectLst/>
+        </p:spPr>
+        <p:style>
+          <a:lnRef idx="1">
+            <a:schemeClr val="accent1"/>
+          </a:lnRef>
+          <a:fillRef idx="3">
+            <a:schemeClr val="accent1"/>
+          </a:fillRef>
+          <a:effectRef idx="2">
+            <a:schemeClr val="accent1"/>
+          </a:effectRef>
+          <a:fontRef idx="minor">
+            <a:schemeClr val="lt1"/>
+          </a:fontRef>
+        </p:style>
+        <p:txBody>
+          <a:bodyPr rtlCol="0" anchor="ctr"/>
+          <a:lstStyle/>
+          <a:p>
+            <a:pPr algn="ctr"/>
+          </a:p>
+        </p:txBody>
+      </p:sp>
+      <p:sp>
+        <p:nvSpPr>
+          <p:cNvPr id="22" name="Rectangle 21"/>
+          <p:cNvSpPr/>
+          <p:nvPr/>
+        </p:nvSpPr>
+        <p:spPr>
+          <a:xfrm>
+            <a:off x="411480" y="2743200"/>
+            <a:ext cx="82296" cy="566928"/>
+          </a:xfrm>
+          <a:prstGeom prst="rect">
+            <a:avLst/>
+          </a:prstGeom>
+          <a:solidFill>
+            <a:srgbClr val="5422FF"/>
+          </a:solidFill>
+          <a:ln>
+            <a:noFill/>
+          </a:ln>
+          <a:effectLst/>
+        </p:spPr>
+        <p:style>
+          <a:lnRef idx="1">
+            <a:schemeClr val="accent1"/>
+          </a:lnRef>
+          <a:fillRef idx="3">
+            <a:schemeClr val="accent1"/>
+          </a:fillRef>
+          <a:effectRef idx="2">
+            <a:schemeClr val="accent1"/>
+          </a:effectRef>
+          <a:fontRef idx="minor">
+            <a:schemeClr val="lt1"/>
+          </a:fontRef>
+        </p:style>
+        <p:txBody>
+          <a:bodyPr rtlCol="0" anchor="ctr"/>
+          <a:lstStyle/>
+          <a:p>
+            <a:pPr algn="ctr"/>
+          </a:p>
+        </p:txBody>
+      </p:sp>
+      <p:sp>
+        <p:nvSpPr>
+          <p:cNvPr id="23" name="TextBox 22"/>
+          <p:cNvSpPr txBox="1"/>
+          <p:nvPr/>
+        </p:nvSpPr>
+        <p:spPr>
+          <a:xfrm>
+            <a:off x="649224" y="2834640"/>
+            <a:ext cx="2057400" cy="484632"/>
+          </a:xfrm>
+          <a:prstGeom prst="rect">
+            <a:avLst/>
+          </a:prstGeom>
+          <a:noFill/>
+        </p:spPr>
+        <p:txBody>
+          <a:bodyPr wrap="square" lIns="0" rIns="0" tIns="0" bIns="0" anchor="ctr">
+            <a:spAutoFit/>
+          </a:bodyPr>
+          <a:lstStyle/>
+          <a:p>
+            <a:pPr algn="l"/>
+            <a:r>
+              <a:rPr sz="1300" b="1">
+                <a:solidFill>
+                  <a:srgbClr val="1C153E"/>
+                </a:solidFill>
+                <a:latin typeface="Calibri"/>
+              </a:rPr>
+              <a:t>Two-pass discipline</a:t>
+            </a:r>
+          </a:p>
+        </p:txBody>
+      </p:sp>
+      <p:sp>
+        <p:nvSpPr>
+          <p:cNvPr id="24" name="TextBox 23"/>
+          <p:cNvSpPr txBox="1"/>
+          <p:nvPr/>
+        </p:nvSpPr>
+        <p:spPr>
+          <a:xfrm>
+            <a:off x="2816352" y="2834640"/>
+            <a:ext cx="5422392" cy="484632"/>
+          </a:xfrm>
+          <a:prstGeom prst="rect">
+            <a:avLst/>
+          </a:prstGeom>
+          <a:noFill/>
+        </p:spPr>
+        <p:txBody>
+          <a:bodyPr wrap="square" lIns="0" rIns="0" tIns="0" bIns="0" anchor="ctr">
+            <a:spAutoFit/>
+          </a:bodyPr>
+          <a:lstStyle/>
+          <a:p>
+            <a:pPr algn="l"/>
+            <a:r>
+              <a:rPr sz="1150" b="0">
+                <a:solidFill>
+                  <a:srgbClr val="5D5A72"/>
+                </a:solidFill>
+                <a:latin typeface="Calibri"/>
+              </a:rPr>
+              <a:t>list_customers returns one compact line per account; only 2–3 then get a detail call.</a:t>
+            </a:r>
+          </a:p>
+        </p:txBody>
+      </p:sp>
+      <p:sp>
+        <p:nvSpPr>
+          <p:cNvPr id="25" name="Rectangle 24"/>
+          <p:cNvSpPr/>
+          <p:nvPr/>
+        </p:nvSpPr>
+        <p:spPr>
+          <a:xfrm>
+            <a:off x="411480" y="3401568"/>
+            <a:ext cx="7955279" cy="566928"/>
+          </a:xfrm>
+          <a:prstGeom prst="rect">
+            <a:avLst/>
+          </a:prstGeom>
+          <a:solidFill>
+            <a:srgbClr val="F7F5FF"/>
+          </a:solidFill>
+          <a:ln>
+            <a:noFill/>
+          </a:ln>
+          <a:effectLst/>
+        </p:spPr>
+        <p:style>
+          <a:lnRef idx="1">
+            <a:schemeClr val="accent1"/>
+          </a:lnRef>
+          <a:fillRef idx="3">
+            <a:schemeClr val="accent1"/>
+          </a:fillRef>
+          <a:effectRef idx="2">
+            <a:schemeClr val="accent1"/>
+          </a:effectRef>
+          <a:fontRef idx="minor">
+            <a:schemeClr val="lt1"/>
+          </a:fontRef>
+        </p:style>
+        <p:txBody>
+          <a:bodyPr rtlCol="0" anchor="ctr"/>
+          <a:lstStyle/>
+          <a:p>
+            <a:pPr algn="ctr"/>
+          </a:p>
+        </p:txBody>
+      </p:sp>
+      <p:sp>
+        <p:nvSpPr>
+          <p:cNvPr id="26" name="Rectangle 25"/>
+          <p:cNvSpPr/>
+          <p:nvPr/>
+        </p:nvSpPr>
+        <p:spPr>
+          <a:xfrm>
+            <a:off x="411480" y="3401568"/>
+            <a:ext cx="82296" cy="566928"/>
+          </a:xfrm>
+          <a:prstGeom prst="rect">
+            <a:avLst/>
+          </a:prstGeom>
+          <a:solidFill>
+            <a:srgbClr val="158A5E"/>
+          </a:solidFill>
+          <a:ln>
+            <a:noFill/>
+          </a:ln>
+          <a:effectLst/>
+        </p:spPr>
+        <p:style>
+          <a:lnRef idx="1">
+            <a:schemeClr val="accent1"/>
+          </a:lnRef>
+          <a:fillRef idx="3">
+            <a:schemeClr val="accent1"/>
+          </a:fillRef>
+          <a:effectRef idx="2">
+            <a:schemeClr val="accent1"/>
+          </a:effectRef>
+          <a:fontRef idx="minor">
+            <a:schemeClr val="lt1"/>
+          </a:fontRef>
+        </p:style>
+        <p:txBody>
+          <a:bodyPr rtlCol="0" anchor="ctr"/>
+          <a:lstStyle/>
+          <a:p>
+            <a:pPr algn="ctr"/>
+          </a:p>
+        </p:txBody>
+      </p:sp>
+      <p:sp>
+        <p:nvSpPr>
+          <p:cNvPr id="27" name="TextBox 26"/>
+          <p:cNvSpPr txBox="1"/>
+          <p:nvPr/>
+        </p:nvSpPr>
+        <p:spPr>
+          <a:xfrm>
+            <a:off x="649224" y="3493008"/>
+            <a:ext cx="2057400" cy="484632"/>
+          </a:xfrm>
+          <a:prstGeom prst="rect">
+            <a:avLst/>
+          </a:prstGeom>
+          <a:noFill/>
+        </p:spPr>
+        <p:txBody>
+          <a:bodyPr wrap="square" lIns="0" rIns="0" tIns="0" bIns="0" anchor="ctr">
+            <a:spAutoFit/>
+          </a:bodyPr>
+          <a:lstStyle/>
+          <a:p>
+            <a:pPr algn="l"/>
+            <a:r>
+              <a:rPr sz="1300" b="1">
+                <a:solidFill>
+                  <a:srgbClr val="1C153E"/>
+                </a:solidFill>
+                <a:latin typeface="Calibri"/>
+              </a:rPr>
+              <a:t>No redundant payloads</a:t>
+            </a:r>
+          </a:p>
+        </p:txBody>
+      </p:sp>
+      <p:sp>
+        <p:nvSpPr>
+          <p:cNvPr id="28" name="TextBox 27"/>
+          <p:cNvSpPr txBox="1"/>
+          <p:nvPr/>
+        </p:nvSpPr>
+        <p:spPr>
+          <a:xfrm>
+            <a:off x="2816352" y="3493008"/>
+            <a:ext cx="5422392" cy="484632"/>
+          </a:xfrm>
+          <a:prstGeom prst="rect">
+            <a:avLst/>
+          </a:prstGeom>
+          <a:noFill/>
+        </p:spPr>
+        <p:txBody>
+          <a:bodyPr wrap="square" lIns="0" rIns="0" tIns="0" bIns="0" anchor="ctr">
+            <a:spAutoFit/>
+          </a:bodyPr>
+          <a:lstStyle/>
+          <a:p>
+            <a:pPr algn="l"/>
+            <a:r>
+              <a:rPr sz="1150" b="0">
+                <a:solidFill>
+                  <a:srgbClr val="5D5A72"/>
+                </a:solidFill>
+                <a:latin typeface="Calibri"/>
+              </a:rPr>
+              <a:t>News extraction reads headlines only — never article bodies — and pseudonymisation replaces names with short tokens.</a:t>
+            </a:r>
+          </a:p>
+        </p:txBody>
+      </p:sp>
+      <p:sp>
+        <p:nvSpPr>
+          <p:cNvPr id="29" name="Rectangle 28"/>
+          <p:cNvSpPr/>
+          <p:nvPr/>
+        </p:nvSpPr>
+        <p:spPr>
+          <a:xfrm>
+            <a:off x="411480" y="4059935"/>
+            <a:ext cx="7955279" cy="566928"/>
+          </a:xfrm>
+          <a:prstGeom prst="rect">
+            <a:avLst/>
+          </a:prstGeom>
+          <a:solidFill>
+            <a:srgbClr val="F7F5FF"/>
+          </a:solidFill>
+          <a:ln>
+            <a:noFill/>
+          </a:ln>
+          <a:effectLst/>
+        </p:spPr>
+        <p:style>
+          <a:lnRef idx="1">
+            <a:schemeClr val="accent1"/>
+          </a:lnRef>
+          <a:fillRef idx="3">
+            <a:schemeClr val="accent1"/>
+          </a:fillRef>
+          <a:effectRef idx="2">
+            <a:schemeClr val="accent1"/>
+          </a:effectRef>
+          <a:fontRef idx="minor">
+            <a:schemeClr val="lt1"/>
+          </a:fontRef>
+        </p:style>
+        <p:txBody>
+          <a:bodyPr rtlCol="0" anchor="ctr"/>
+          <a:lstStyle/>
+          <a:p>
+            <a:pPr algn="ctr"/>
+          </a:p>
+        </p:txBody>
+      </p:sp>
+      <p:sp>
+        <p:nvSpPr>
+          <p:cNvPr id="30" name="Rectangle 29"/>
+          <p:cNvSpPr/>
+          <p:nvPr/>
+        </p:nvSpPr>
+        <p:spPr>
+          <a:xfrm>
+            <a:off x="411480" y="4059935"/>
+            <a:ext cx="82296" cy="566928"/>
+          </a:xfrm>
+          <a:prstGeom prst="rect">
+            <a:avLst/>
+          </a:prstGeom>
+          <a:solidFill>
+            <a:srgbClr val="D98E2B"/>
+          </a:solidFill>
+          <a:ln>
+            <a:noFill/>
+          </a:ln>
+          <a:effectLst/>
+        </p:spPr>
+        <p:style>
+          <a:lnRef idx="1">
+            <a:schemeClr val="accent1"/>
+          </a:lnRef>
+          <a:fillRef idx="3">
+            <a:schemeClr val="accent1"/>
+          </a:fillRef>
+          <a:effectRef idx="2">
+            <a:schemeClr val="accent1"/>
+          </a:effectRef>
+          <a:fontRef idx="minor">
+            <a:schemeClr val="lt1"/>
+          </a:fontRef>
+        </p:style>
+        <p:txBody>
+          <a:bodyPr rtlCol="0" anchor="ctr"/>
+          <a:lstStyle/>
+          <a:p>
+            <a:pPr algn="ctr"/>
+          </a:p>
+        </p:txBody>
+      </p:sp>
+      <p:sp>
+        <p:nvSpPr>
+          <p:cNvPr id="31" name="TextBox 30"/>
+          <p:cNvSpPr txBox="1"/>
+          <p:nvPr/>
+        </p:nvSpPr>
+        <p:spPr>
+          <a:xfrm>
+            <a:off x="649224" y="4151375"/>
+            <a:ext cx="2057400" cy="484632"/>
+          </a:xfrm>
+          <a:prstGeom prst="rect">
+            <a:avLst/>
+          </a:prstGeom>
+          <a:noFill/>
+        </p:spPr>
+        <p:txBody>
+          <a:bodyPr wrap="square" lIns="0" rIns="0" tIns="0" bIns="0" anchor="ctr">
+            <a:spAutoFit/>
+          </a:bodyPr>
+          <a:lstStyle/>
+          <a:p>
+            <a:pPr algn="l"/>
+            <a:r>
+              <a:rPr sz="1300" b="1">
+                <a:solidFill>
+                  <a:srgbClr val="1C153E"/>
+                </a:solidFill>
+                <a:latin typeface="Calibri"/>
+              </a:rPr>
+              <a:t>Specific instructions</a:t>
+            </a:r>
+          </a:p>
+        </p:txBody>
+      </p:sp>
+      <p:sp>
+        <p:nvSpPr>
+          <p:cNvPr id="32" name="TextBox 31"/>
+          <p:cNvSpPr txBox="1"/>
+          <p:nvPr/>
+        </p:nvSpPr>
+        <p:spPr>
+          <a:xfrm>
+            <a:off x="2816352" y="4151375"/>
+            <a:ext cx="5422392" cy="484632"/>
+          </a:xfrm>
+          <a:prstGeom prst="rect">
+            <a:avLst/>
+          </a:prstGeom>
+          <a:noFill/>
+        </p:spPr>
+        <p:txBody>
+          <a:bodyPr wrap="square" lIns="0" rIns="0" tIns="0" bIns="0" anchor="ctr">
+            <a:spAutoFit/>
+          </a:bodyPr>
+          <a:lstStyle/>
+          <a:p>
+            <a:pPr algn="l"/>
+            <a:r>
+              <a:rPr sz="1150" b="0">
+                <a:solidFill>
+                  <a:srgbClr val="5D5A72"/>
+                </a:solidFill>
+                <a:latin typeface="Calibri"/>
+              </a:rPr>
+              <a:t>The same survey-then-drill rule ships in the MCP server, so connected clients are efficient too.</a:t>
+            </a:r>
+          </a:p>
+        </p:txBody>
+      </p:sp>
+      <p:sp>
+        <p:nvSpPr>
+          <p:cNvPr id="33" name="TextBox 32"/>
+          <p:cNvSpPr txBox="1"/>
+          <p:nvPr/>
+        </p:nvSpPr>
+        <p:spPr>
+          <a:xfrm>
+            <a:off x="411480" y="4645152"/>
+            <a:ext cx="7955279" cy="201168"/>
+          </a:xfrm>
+          <a:prstGeom prst="rect">
+            <a:avLst/>
+          </a:prstGeom>
+          <a:noFill/>
+        </p:spPr>
+        <p:txBody>
+          <a:bodyPr wrap="square" lIns="0" rIns="0" tIns="0" bIns="0" anchor="t">
+            <a:spAutoFit/>
+          </a:bodyPr>
+          <a:lstStyle/>
+          <a:p>
+            <a:pPr algn="l"/>
+            <a:r>
+              <a:rPr sz="850" b="0">
+                <a:solidFill>
+                  <a:srgbClr val="5D5A72"/>
+                </a:solidFill>
+                <a:latin typeface="Calibri"/>
+              </a:rPr>
+              <a:t>Measured from the /agent/chat response, which reports token usage per answer.</a:t>
+            </a:r>
+          </a:p>
+        </p:txBody>
+      </p:sp>
+    </p:spTree>
+  </p:cSld>
+  <p:clrMapOvr>
+    <a:masterClrMapping/>
+  </p:clrMapOvr>
+</p:sld>
+</file>
+
+<file path=ppt/slides/slide11.xml><?xml version="1.0" encoding="utf-8"?>
+<p:sld xmlns:a="http://schemas.openxmlformats.org/drawingml/2006/main" xmlns:p="http://schemas.openxmlformats.org/presentationml/2006/main" xmlns:r="http://schemas.openxmlformats.org/officeDocument/2006/relationships">
+  <p:cSld>
+    <p:spTree>
+      <p:nvGrpSpPr>
+        <p:cNvPr id="1" name=""/>
+        <p:cNvGrpSpPr/>
+        <p:nvPr/>
+      </p:nvGrpSpPr>
+      <p:grpSpPr/>
+      <p:sp>
+        <p:nvSpPr>
+          <p:cNvPr id="2" name="Rectangle 1"/>
+          <p:cNvSpPr/>
+          <p:nvPr/>
+        </p:nvSpPr>
+        <p:spPr>
+          <a:xfrm>
+            <a:off x="0" y="0"/>
+            <a:ext cx="9144000" cy="5138928"/>
+          </a:xfrm>
+          <a:prstGeom prst="rect">
+            <a:avLst/>
+          </a:prstGeom>
+          <a:solidFill>
+            <a:srgbClr val="FFFFFF"/>
+          </a:solidFill>
+          <a:ln>
+            <a:noFill/>
+          </a:ln>
+          <a:effectLst/>
+        </p:spPr>
+        <p:style>
+          <a:lnRef idx="1">
+            <a:schemeClr val="accent1"/>
+          </a:lnRef>
+          <a:fillRef idx="3">
+            <a:schemeClr val="accent1"/>
+          </a:fillRef>
+          <a:effectRef idx="2">
+            <a:schemeClr val="accent1"/>
+          </a:effectRef>
+          <a:fontRef idx="minor">
+            <a:schemeClr val="lt1"/>
+          </a:fontRef>
+        </p:style>
+        <p:txBody>
+          <a:bodyPr rtlCol="0" anchor="ctr"/>
+          <a:lstStyle/>
+          <a:p>
+            <a:pPr algn="ctr"/>
+          </a:p>
+        </p:txBody>
+      </p:sp>
+      <p:sp>
+        <p:nvSpPr>
+          <p:cNvPr id="3" name="Rectangle 2"/>
+          <p:cNvSpPr/>
+          <p:nvPr/>
+        </p:nvSpPr>
+        <p:spPr>
+          <a:xfrm>
+            <a:off x="411480" y="374904"/>
+            <a:ext cx="64008" cy="219456"/>
+          </a:xfrm>
+          <a:prstGeom prst="rect">
+            <a:avLst/>
+          </a:prstGeom>
+          <a:solidFill>
+            <a:srgbClr val="5422FF"/>
+          </a:solidFill>
+          <a:ln>
+            <a:noFill/>
+          </a:ln>
+          <a:effectLst/>
+        </p:spPr>
+        <p:style>
+          <a:lnRef idx="1">
+            <a:schemeClr val="accent1"/>
+          </a:lnRef>
+          <a:fillRef idx="3">
+            <a:schemeClr val="accent1"/>
+          </a:fillRef>
+          <a:effectRef idx="2">
+            <a:schemeClr val="accent1"/>
+          </a:effectRef>
+          <a:fontRef idx="minor">
+            <a:schemeClr val="lt1"/>
+          </a:fontRef>
+        </p:style>
+        <p:txBody>
+          <a:bodyPr rtlCol="0" anchor="ctr"/>
+          <a:lstStyle/>
+          <a:p>
+            <a:pPr algn="ctr"/>
+          </a:p>
+        </p:txBody>
+      </p:sp>
+      <p:sp>
+        <p:nvSpPr>
+          <p:cNvPr id="4" name="TextBox 3"/>
+          <p:cNvSpPr txBox="1"/>
+          <p:nvPr/>
+        </p:nvSpPr>
+        <p:spPr>
+          <a:xfrm>
+            <a:off x="566928" y="329184"/>
+            <a:ext cx="4114800" cy="274320"/>
+          </a:xfrm>
+          <a:prstGeom prst="rect">
+            <a:avLst/>
+          </a:prstGeom>
+          <a:noFill/>
+        </p:spPr>
+        <p:txBody>
+          <a:bodyPr wrap="square" lIns="0" rIns="0" tIns="0" bIns="0" anchor="t">
+            <a:spAutoFit/>
+          </a:bodyPr>
+          <a:lstStyle/>
+          <a:p>
+            <a:pPr algn="l"/>
+            <a:r>
+              <a:rPr sz="1250" b="1">
+                <a:solidFill>
+                  <a:srgbClr val="5422FF"/>
+                </a:solidFill>
+                <a:latin typeface="Calibri"/>
+              </a:rPr>
+              <a:t>CRITERION 5 — WOW FACTOR</a:t>
+            </a:r>
+          </a:p>
+        </p:txBody>
+      </p:sp>
+      <p:sp>
+        <p:nvSpPr>
+          <p:cNvPr id="5" name="TextBox 4"/>
+          <p:cNvSpPr txBox="1"/>
+          <p:nvPr/>
+        </p:nvSpPr>
+        <p:spPr>
+          <a:xfrm>
+            <a:off x="411480" y="621792"/>
+            <a:ext cx="7891272" cy="484632"/>
+          </a:xfrm>
+          <a:prstGeom prst="rect">
+            <a:avLst/>
+          </a:prstGeom>
+          <a:noFill/>
+        </p:spPr>
+        <p:txBody>
+          <a:bodyPr wrap="square" lIns="0" rIns="0" tIns="0" bIns="0" anchor="t">
+            <a:spAutoFit/>
+          </a:bodyPr>
+          <a:lstStyle/>
+          <a:p>
+            <a:pPr algn="l"/>
+            <a:r>
+              <a:rPr sz="2900" b="1">
+                <a:solidFill>
+                  <a:srgbClr val="1C153E"/>
+                </a:solidFill>
+                <a:latin typeface="Calibri"/>
+              </a:rPr>
+              <a:t>A live demo, on real accounts</a:t>
+            </a:r>
+          </a:p>
+        </p:txBody>
+      </p:sp>
+      <p:sp>
+        <p:nvSpPr>
+          <p:cNvPr id="6" name="TextBox 5"/>
+          <p:cNvSpPr txBox="1"/>
+          <p:nvPr/>
+        </p:nvSpPr>
+        <p:spPr>
+          <a:xfrm>
+            <a:off x="411480" y="1060704"/>
+            <a:ext cx="7818120" cy="347472"/>
+          </a:xfrm>
+          <a:prstGeom prst="rect">
+            <a:avLst/>
+          </a:prstGeom>
+          <a:noFill/>
+        </p:spPr>
+        <p:txBody>
+          <a:bodyPr wrap="square" lIns="0" rIns="0" tIns="0" bIns="0" anchor="t">
+            <a:spAutoFit/>
+          </a:bodyPr>
+          <a:lstStyle/>
+          <a:p>
+            <a:pPr algn="l"/>
+            <a:r>
+              <a:rPr sz="1400" b="0">
+                <a:solidFill>
+                  <a:srgbClr val="5D5A72"/>
+                </a:solidFill>
+                <a:latin typeface="Calibri"/>
+              </a:rPr>
+              <a:t>Manual review versus the automated pass, measured on the same 13 accounts.</a:t>
+            </a:r>
+          </a:p>
+        </p:txBody>
+      </p:sp>
+      <p:sp>
+        <p:nvSpPr>
+          <p:cNvPr id="7" name="TextBox 6"/>
+          <p:cNvSpPr txBox="1"/>
+          <p:nvPr/>
+        </p:nvSpPr>
+        <p:spPr>
+          <a:xfrm>
+            <a:off x="411480" y="4855464"/>
+            <a:ext cx="4114800" cy="210312"/>
+          </a:xfrm>
+          <a:prstGeom prst="rect">
+            <a:avLst/>
+          </a:prstGeom>
+          <a:noFill/>
+        </p:spPr>
+        <p:txBody>
+          <a:bodyPr wrap="square" lIns="0" rIns="0" tIns="0" bIns="0" anchor="t">
+            <a:spAutoFit/>
+          </a:bodyPr>
+          <a:lstStyle/>
+          <a:p>
+            <a:pPr algn="l"/>
+            <a:r>
+              <a:rPr sz="1000" b="0">
+                <a:solidFill>
+                  <a:srgbClr val="5D5A72"/>
+                </a:solidFill>
+                <a:latin typeface="Calibri"/>
+              </a:rPr>
+              <a:t>Gaia ARR Growth Agent</a:t>
+            </a:r>
+          </a:p>
+        </p:txBody>
+      </p:sp>
+      <p:sp>
+        <p:nvSpPr>
+          <p:cNvPr id="8" name="TextBox 7"/>
+          <p:cNvSpPr txBox="1"/>
+          <p:nvPr/>
+        </p:nvSpPr>
+        <p:spPr>
+          <a:xfrm>
+            <a:off x="8229600" y="4855464"/>
+            <a:ext cx="484632" cy="210312"/>
+          </a:xfrm>
+          <a:prstGeom prst="rect">
+            <a:avLst/>
+          </a:prstGeom>
+          <a:noFill/>
+        </p:spPr>
+        <p:txBody>
+          <a:bodyPr wrap="square" lIns="0" rIns="0" tIns="0" bIns="0" anchor="t">
+            <a:spAutoFit/>
+          </a:bodyPr>
+          <a:lstStyle/>
+          <a:p>
+            <a:pPr algn="l"/>
+            <a:r>
+              <a:rPr sz="1000" b="0">
+                <a:solidFill>
+                  <a:srgbClr val="5D5A72"/>
+                </a:solidFill>
+                <a:latin typeface="Calibri"/>
+              </a:rPr>
+              <a:t>11</a:t>
+            </a:r>
+          </a:p>
+        </p:txBody>
+      </p:sp>
+      <p:graphicFrame>
+        <p:nvGraphicFramePr>
+          <p:cNvPr id="9" name="Chart 8"/>
+          <p:cNvGraphicFramePr>
+            <a:graphicFrameLocks noGrp="1"/>
+          </p:cNvGraphicFramePr>
+          <p:nvPr/>
+        </p:nvGraphicFramePr>
+        <p:xfrm>
+          <a:off x="411480" y="1536192"/>
+          <a:ext cx="4343400" cy="2697480"/>
+        </p:xfrm>
+        <a:graphic>
+          <a:graphicData uri="http://schemas.openxmlformats.org/drawingml/2006/chart">
+            <c:chart xmlns:c="http://schemas.openxmlformats.org/drawingml/2006/chart" r:id="rId2"/>
+          </a:graphicData>
+        </a:graphic>
+      </p:graphicFrame>
+      <p:sp>
+        <p:nvSpPr>
+          <p:cNvPr id="10" name="Rectangle 9"/>
+          <p:cNvSpPr/>
+          <p:nvPr/>
+        </p:nvSpPr>
+        <p:spPr>
+          <a:xfrm>
+            <a:off x="4956048" y="1536192"/>
+            <a:ext cx="3410712" cy="475488"/>
+          </a:xfrm>
+          <a:prstGeom prst="rect">
+            <a:avLst/>
+          </a:prstGeom>
+          <a:solidFill>
+            <a:srgbClr val="F7F5FF"/>
+          </a:solidFill>
+          <a:ln>
+            <a:noFill/>
+          </a:ln>
+          <a:effectLst/>
+        </p:spPr>
+        <p:style>
+          <a:lnRef idx="1">
+            <a:schemeClr val="accent1"/>
+          </a:lnRef>
+          <a:fillRef idx="3">
+            <a:schemeClr val="accent1"/>
+          </a:fillRef>
+          <a:effectRef idx="2">
+            <a:schemeClr val="accent1"/>
+          </a:effectRef>
+          <a:fontRef idx="minor">
+            <a:schemeClr val="lt1"/>
+          </a:fontRef>
+        </p:style>
+        <p:txBody>
+          <a:bodyPr rtlCol="0" anchor="ctr"/>
+          <a:lstStyle/>
+          <a:p>
+            <a:pPr algn="ctr"/>
+          </a:p>
+        </p:txBody>
+      </p:sp>
+      <p:sp>
+        <p:nvSpPr>
+          <p:cNvPr id="11" name="TextBox 10"/>
+          <p:cNvSpPr txBox="1"/>
+          <p:nvPr/>
+        </p:nvSpPr>
+        <p:spPr>
+          <a:xfrm>
+            <a:off x="5102352" y="1600200"/>
+            <a:ext cx="3154680" cy="182880"/>
+          </a:xfrm>
+          <a:prstGeom prst="rect">
+            <a:avLst/>
+          </a:prstGeom>
+          <a:noFill/>
+        </p:spPr>
+        <p:txBody>
+          <a:bodyPr wrap="square" lIns="0" rIns="0" tIns="0" bIns="0" anchor="t">
+            <a:spAutoFit/>
+          </a:bodyPr>
+          <a:lstStyle/>
+          <a:p>
+            <a:pPr algn="l"/>
+            <a:r>
+              <a:rPr sz="1050" b="1">
+                <a:solidFill>
+                  <a:srgbClr val="1C153E"/>
+                </a:solidFill>
+                <a:latin typeface="Calibri"/>
+              </a:rPr>
+              <a:t>1.  The board, live</a:t>
+            </a:r>
+          </a:p>
+        </p:txBody>
+      </p:sp>
+      <p:sp>
+        <p:nvSpPr>
+          <p:cNvPr id="12" name="TextBox 11"/>
+          <p:cNvSpPr txBox="1"/>
+          <p:nvPr/>
+        </p:nvSpPr>
+        <p:spPr>
+          <a:xfrm>
+            <a:off x="5102352" y="1792224"/>
+            <a:ext cx="3154680" cy="164592"/>
+          </a:xfrm>
+          <a:prstGeom prst="rect">
+            <a:avLst/>
+          </a:prstGeom>
+          <a:noFill/>
+        </p:spPr>
+        <p:txBody>
+          <a:bodyPr wrap="square" lIns="0" rIns="0" tIns="0" bIns="0" anchor="t">
+            <a:spAutoFit/>
+          </a:bodyPr>
+          <a:lstStyle/>
+          <a:p>
+            <a:pPr algn="l"/>
+            <a:r>
+              <a:rPr sz="850" b="0">
+                <a:solidFill>
+                  <a:srgbClr val="5D5A72"/>
+                </a:solidFill>
+                <a:latin typeface="Calibri"/>
+              </a:rPr>
+              <a:t>38 signals, 13 real accounts, every card tagged.</a:t>
+            </a:r>
+          </a:p>
+        </p:txBody>
+      </p:sp>
+      <p:sp>
+        <p:nvSpPr>
+          <p:cNvPr id="13" name="Rectangle 12"/>
+          <p:cNvSpPr/>
+          <p:nvPr/>
+        </p:nvSpPr>
+        <p:spPr>
+          <a:xfrm>
+            <a:off x="4956048" y="2084831"/>
+            <a:ext cx="3410712" cy="475488"/>
+          </a:xfrm>
+          <a:prstGeom prst="rect">
+            <a:avLst/>
+          </a:prstGeom>
+          <a:solidFill>
+            <a:srgbClr val="F7F5FF"/>
+          </a:solidFill>
+          <a:ln>
+            <a:noFill/>
+          </a:ln>
+          <a:effectLst/>
+        </p:spPr>
+        <p:style>
+          <a:lnRef idx="1">
+            <a:schemeClr val="accent1"/>
+          </a:lnRef>
+          <a:fillRef idx="3">
+            <a:schemeClr val="accent1"/>
+          </a:fillRef>
+          <a:effectRef idx="2">
+            <a:schemeClr val="accent1"/>
+          </a:effectRef>
+          <a:fontRef idx="minor">
+            <a:schemeClr val="lt1"/>
+          </a:fontRef>
+        </p:style>
+        <p:txBody>
+          <a:bodyPr rtlCol="0" anchor="ctr"/>
+          <a:lstStyle/>
+          <a:p>
+            <a:pPr algn="ctr"/>
+          </a:p>
+        </p:txBody>
+      </p:sp>
+      <p:sp>
+        <p:nvSpPr>
+          <p:cNvPr id="14" name="TextBox 13"/>
+          <p:cNvSpPr txBox="1"/>
+          <p:nvPr/>
+        </p:nvSpPr>
+        <p:spPr>
+          <a:xfrm>
+            <a:off x="5102352" y="2148839"/>
+            <a:ext cx="3154680" cy="182880"/>
+          </a:xfrm>
+          <a:prstGeom prst="rect">
+            <a:avLst/>
+          </a:prstGeom>
+          <a:noFill/>
+        </p:spPr>
+        <p:txBody>
+          <a:bodyPr wrap="square" lIns="0" rIns="0" tIns="0" bIns="0" anchor="t">
+            <a:spAutoFit/>
+          </a:bodyPr>
+          <a:lstStyle/>
+          <a:p>
+            <a:pPr algn="l"/>
+            <a:r>
+              <a:rPr sz="1050" b="1">
+                <a:solidFill>
+                  <a:srgbClr val="1C153E"/>
+                </a:solidFill>
+                <a:latin typeface="Calibri"/>
+              </a:rPr>
+              <a:t>2.  One click to action</a:t>
+            </a:r>
+          </a:p>
+        </p:txBody>
+      </p:sp>
+      <p:sp>
+        <p:nvSpPr>
+          <p:cNvPr id="15" name="TextBox 14"/>
+          <p:cNvSpPr txBox="1"/>
+          <p:nvPr/>
+        </p:nvSpPr>
+        <p:spPr>
+          <a:xfrm>
+            <a:off x="5102352" y="2340863"/>
+            <a:ext cx="3154680" cy="164592"/>
+          </a:xfrm>
+          <a:prstGeom prst="rect">
+            <a:avLst/>
+          </a:prstGeom>
+          <a:noFill/>
+        </p:spPr>
+        <p:txBody>
+          <a:bodyPr wrap="square" lIns="0" rIns="0" tIns="0" bIns="0" anchor="t">
+            <a:spAutoFit/>
+          </a:bodyPr>
+          <a:lstStyle/>
+          <a:p>
+            <a:pPr algn="l"/>
+            <a:r>
+              <a:rPr sz="850" b="0">
+                <a:solidFill>
+                  <a:srgbClr val="5D5A72"/>
+                </a:solidFill>
+                <a:latin typeface="Calibri"/>
+              </a:rPr>
+              <a:t>Drafted email, right recipient, article attached.</a:t>
+            </a:r>
+          </a:p>
+        </p:txBody>
+      </p:sp>
+      <p:sp>
+        <p:nvSpPr>
+          <p:cNvPr id="16" name="Rectangle 15"/>
+          <p:cNvSpPr/>
+          <p:nvPr/>
+        </p:nvSpPr>
+        <p:spPr>
+          <a:xfrm>
+            <a:off x="4956048" y="2633472"/>
+            <a:ext cx="3410712" cy="475488"/>
+          </a:xfrm>
+          <a:prstGeom prst="rect">
+            <a:avLst/>
+          </a:prstGeom>
+          <a:solidFill>
+            <a:srgbClr val="F7F5FF"/>
+          </a:solidFill>
+          <a:ln>
+            <a:noFill/>
+          </a:ln>
+          <a:effectLst/>
+        </p:spPr>
+        <p:style>
+          <a:lnRef idx="1">
+            <a:schemeClr val="accent1"/>
+          </a:lnRef>
+          <a:fillRef idx="3">
+            <a:schemeClr val="accent1"/>
+          </a:fillRef>
+          <a:effectRef idx="2">
+            <a:schemeClr val="accent1"/>
+          </a:effectRef>
+          <a:fontRef idx="minor">
+            <a:schemeClr val="lt1"/>
+          </a:fontRef>
+        </p:style>
+        <p:txBody>
+          <a:bodyPr rtlCol="0" anchor="ctr"/>
+          <a:lstStyle/>
+          <a:p>
+            <a:pPr algn="ctr"/>
+          </a:p>
+        </p:txBody>
+      </p:sp>
+      <p:sp>
+        <p:nvSpPr>
+          <p:cNvPr id="17" name="TextBox 16"/>
+          <p:cNvSpPr txBox="1"/>
+          <p:nvPr/>
+        </p:nvSpPr>
+        <p:spPr>
+          <a:xfrm>
+            <a:off x="5102352" y="2697479"/>
+            <a:ext cx="3154680" cy="182880"/>
+          </a:xfrm>
+          <a:prstGeom prst="rect">
+            <a:avLst/>
+          </a:prstGeom>
+          <a:noFill/>
+        </p:spPr>
+        <p:txBody>
+          <a:bodyPr wrap="square" lIns="0" rIns="0" tIns="0" bIns="0" anchor="t">
+            <a:spAutoFit/>
+          </a:bodyPr>
+          <a:lstStyle/>
+          <a:p>
+            <a:pPr algn="l"/>
+            <a:r>
+              <a:rPr sz="1050" b="1">
+                <a:solidFill>
+                  <a:srgbClr val="1C153E"/>
+                </a:solidFill>
+                <a:latin typeface="Calibri"/>
+              </a:rPr>
+              <a:t>3.  It ran by itself</a:t>
+            </a:r>
+          </a:p>
+        </p:txBody>
+      </p:sp>
+      <p:sp>
+        <p:nvSpPr>
+          <p:cNvPr id="18" name="TextBox 17"/>
+          <p:cNvSpPr txBox="1"/>
+          <p:nvPr/>
+        </p:nvSpPr>
+        <p:spPr>
+          <a:xfrm>
+            <a:off x="5102352" y="2889504"/>
+            <a:ext cx="3154680" cy="164592"/>
+          </a:xfrm>
+          <a:prstGeom prst="rect">
+            <a:avLst/>
+          </a:prstGeom>
+          <a:noFill/>
+        </p:spPr>
+        <p:txBody>
+          <a:bodyPr wrap="square" lIns="0" rIns="0" tIns="0" bIns="0" anchor="t">
+            <a:spAutoFit/>
+          </a:bodyPr>
+          <a:lstStyle/>
+          <a:p>
+            <a:pPr algn="l"/>
+            <a:r>
+              <a:rPr sz="850" b="0">
+                <a:solidFill>
+                  <a:srgbClr val="5D5A72"/>
+                </a:solidFill>
+                <a:latin typeface="Calibri"/>
+              </a:rPr>
+              <a:t>13 accounts researched today, unattended.</a:t>
+            </a:r>
+          </a:p>
+        </p:txBody>
+      </p:sp>
+      <p:sp>
+        <p:nvSpPr>
+          <p:cNvPr id="19" name="Rectangle 18"/>
+          <p:cNvSpPr/>
+          <p:nvPr/>
+        </p:nvSpPr>
+        <p:spPr>
+          <a:xfrm>
+            <a:off x="4956048" y="3182111"/>
+            <a:ext cx="3410712" cy="475488"/>
+          </a:xfrm>
+          <a:prstGeom prst="rect">
+            <a:avLst/>
+          </a:prstGeom>
+          <a:solidFill>
+            <a:srgbClr val="F7F5FF"/>
+          </a:solidFill>
+          <a:ln>
+            <a:noFill/>
+          </a:ln>
+          <a:effectLst/>
+        </p:spPr>
+        <p:style>
+          <a:lnRef idx="1">
+            <a:schemeClr val="accent1"/>
+          </a:lnRef>
+          <a:fillRef idx="3">
+            <a:schemeClr val="accent1"/>
+          </a:fillRef>
+          <a:effectRef idx="2">
+            <a:schemeClr val="accent1"/>
+          </a:effectRef>
+          <a:fontRef idx="minor">
+            <a:schemeClr val="lt1"/>
+          </a:fontRef>
+        </p:style>
+        <p:txBody>
+          <a:bodyPr rtlCol="0" anchor="ctr"/>
+          <a:lstStyle/>
+          <a:p>
+            <a:pPr algn="ctr"/>
+          </a:p>
+        </p:txBody>
+      </p:sp>
+      <p:sp>
+        <p:nvSpPr>
+          <p:cNvPr id="20" name="TextBox 19"/>
+          <p:cNvSpPr txBox="1"/>
+          <p:nvPr/>
+        </p:nvSpPr>
+        <p:spPr>
+          <a:xfrm>
+            <a:off x="5102352" y="3246119"/>
+            <a:ext cx="3154680" cy="182880"/>
+          </a:xfrm>
+          <a:prstGeom prst="rect">
+            <a:avLst/>
+          </a:prstGeom>
+          <a:noFill/>
+        </p:spPr>
+        <p:txBody>
+          <a:bodyPr wrap="square" lIns="0" rIns="0" tIns="0" bIns="0" anchor="t">
+            <a:spAutoFit/>
+          </a:bodyPr>
+          <a:lstStyle/>
+          <a:p>
+            <a:pPr algn="l"/>
+            <a:r>
+              <a:rPr sz="1050" b="1">
+                <a:solidFill>
+                  <a:srgbClr val="1C153E"/>
+                </a:solidFill>
+                <a:latin typeface="Calibri"/>
+              </a:rPr>
+              <a:t>4.  What we haven't built</a:t>
+            </a:r>
+          </a:p>
+        </p:txBody>
+      </p:sp>
+      <p:sp>
+        <p:nvSpPr>
+          <p:cNvPr id="21" name="TextBox 20"/>
+          <p:cNvSpPr txBox="1"/>
+          <p:nvPr/>
+        </p:nvSpPr>
+        <p:spPr>
+          <a:xfrm>
+            <a:off x="5102352" y="3438144"/>
+            <a:ext cx="3154680" cy="164592"/>
+          </a:xfrm>
+          <a:prstGeom prst="rect">
+            <a:avLst/>
+          </a:prstGeom>
+          <a:noFill/>
+        </p:spPr>
+        <p:txBody>
+          <a:bodyPr wrap="square" lIns="0" rIns="0" tIns="0" bIns="0" anchor="t">
+            <a:spAutoFit/>
+          </a:bodyPr>
+          <a:lstStyle/>
+          <a:p>
+            <a:pPr algn="l"/>
+            <a:r>
+              <a:rPr sz="850" b="0">
+                <a:solidFill>
+                  <a:srgbClr val="5D5A72"/>
+                </a:solidFill>
+                <a:latin typeface="Calibri"/>
+              </a:rPr>
+              <a:t>All 23 triggers, each naming the data it needs.</a:t>
+            </a:r>
+          </a:p>
+        </p:txBody>
+      </p:sp>
+      <p:sp>
+        <p:nvSpPr>
+          <p:cNvPr id="22" name="Rectangle 21"/>
+          <p:cNvSpPr/>
+          <p:nvPr/>
+        </p:nvSpPr>
+        <p:spPr>
+          <a:xfrm>
+            <a:off x="4956048" y="3730752"/>
+            <a:ext cx="3410712" cy="475488"/>
+          </a:xfrm>
+          <a:prstGeom prst="rect">
+            <a:avLst/>
+          </a:prstGeom>
+          <a:solidFill>
+            <a:srgbClr val="F7F5FF"/>
+          </a:solidFill>
+          <a:ln>
+            <a:noFill/>
+          </a:ln>
+          <a:effectLst/>
+        </p:spPr>
+        <p:style>
+          <a:lnRef idx="1">
+            <a:schemeClr val="accent1"/>
+          </a:lnRef>
+          <a:fillRef idx="3">
+            <a:schemeClr val="accent1"/>
+          </a:fillRef>
+          <a:effectRef idx="2">
+            <a:schemeClr val="accent1"/>
+          </a:effectRef>
+          <a:fontRef idx="minor">
+            <a:schemeClr val="lt1"/>
+          </a:fontRef>
+        </p:style>
+        <p:txBody>
+          <a:bodyPr rtlCol="0" anchor="ctr"/>
+          <a:lstStyle/>
+          <a:p>
+            <a:pPr algn="ctr"/>
+          </a:p>
+        </p:txBody>
+      </p:sp>
+      <p:sp>
+        <p:nvSpPr>
+          <p:cNvPr id="23" name="TextBox 22"/>
+          <p:cNvSpPr txBox="1"/>
+          <p:nvPr/>
+        </p:nvSpPr>
+        <p:spPr>
+          <a:xfrm>
+            <a:off x="5102352" y="3794760"/>
+            <a:ext cx="3154680" cy="182880"/>
+          </a:xfrm>
+          <a:prstGeom prst="rect">
+            <a:avLst/>
+          </a:prstGeom>
+          <a:noFill/>
+        </p:spPr>
+        <p:txBody>
+          <a:bodyPr wrap="square" lIns="0" rIns="0" tIns="0" bIns="0" anchor="t">
+            <a:spAutoFit/>
+          </a:bodyPr>
+          <a:lstStyle/>
+          <a:p>
+            <a:pPr algn="l"/>
+            <a:r>
+              <a:rPr sz="1050" b="1">
+                <a:solidFill>
+                  <a:srgbClr val="1C153E"/>
+                </a:solidFill>
+                <a:latin typeface="Calibri"/>
+              </a:rPr>
+              <a:t>5.  No UI at all</a:t>
+            </a:r>
+          </a:p>
+        </p:txBody>
+      </p:sp>
+      <p:sp>
+        <p:nvSpPr>
+          <p:cNvPr id="24" name="TextBox 23"/>
+          <p:cNvSpPr txBox="1"/>
+          <p:nvPr/>
+        </p:nvSpPr>
+        <p:spPr>
+          <a:xfrm>
+            <a:off x="5102352" y="3986784"/>
+            <a:ext cx="3154680" cy="164592"/>
+          </a:xfrm>
+          <a:prstGeom prst="rect">
+            <a:avLst/>
+          </a:prstGeom>
+          <a:noFill/>
+        </p:spPr>
+        <p:txBody>
+          <a:bodyPr wrap="square" lIns="0" rIns="0" tIns="0" bIns="0" anchor="t">
+            <a:spAutoFit/>
+          </a:bodyPr>
+          <a:lstStyle/>
+          <a:p>
+            <a:pPr algn="l"/>
+            <a:r>
+              <a:rPr sz="850" b="0">
+                <a:solidFill>
+                  <a:srgbClr val="5D5A72"/>
+                </a:solidFill>
+                <a:latin typeface="Calibri"/>
+              </a:rPr>
+              <a:t>The same tools, answering live over MCP.</a:t>
+            </a:r>
+          </a:p>
+        </p:txBody>
+      </p:sp>
+      <p:sp>
+        <p:nvSpPr>
+          <p:cNvPr id="25" name="TextBox 24"/>
+          <p:cNvSpPr txBox="1"/>
+          <p:nvPr/>
+        </p:nvSpPr>
+        <p:spPr>
+          <a:xfrm>
+            <a:off x="411480" y="4407408"/>
+            <a:ext cx="7955279" cy="219456"/>
+          </a:xfrm>
+          <a:prstGeom prst="rect">
+            <a:avLst/>
+          </a:prstGeom>
+          <a:noFill/>
+        </p:spPr>
+        <p:txBody>
+          <a:bodyPr wrap="square" lIns="0" rIns="0" tIns="0" bIns="0" anchor="t">
+            <a:spAutoFit/>
+          </a:bodyPr>
+          <a:lstStyle/>
+          <a:p>
+            <a:pPr algn="l"/>
+            <a:r>
+              <a:rPr sz="1100" b="1">
+                <a:solidFill>
+                  <a:srgbClr val="5422FF"/>
+                </a:solidFill>
+                <a:latin typeface="Calibri"/>
+              </a:rPr>
+              <a:t>Presented by the engineers who built it — live against the real portfolio, not a recording.</a:t>
+            </a:r>
+          </a:p>
+        </p:txBody>
+      </p:sp>
+      <p:sp>
+        <p:nvSpPr>
+          <p:cNvPr id="26" name="TextBox 25"/>
+          <p:cNvSpPr txBox="1"/>
+          <p:nvPr/>
+        </p:nvSpPr>
+        <p:spPr>
+          <a:xfrm>
+            <a:off x="411480" y="4645152"/>
+            <a:ext cx="7955279" cy="201168"/>
+          </a:xfrm>
+          <a:prstGeom prst="rect">
+            <a:avLst/>
+          </a:prstGeom>
+          <a:noFill/>
+        </p:spPr>
+        <p:txBody>
+          <a:bodyPr wrap="square" lIns="0" rIns="0" tIns="0" bIns="0" anchor="t">
+            <a:spAutoFit/>
+          </a:bodyPr>
+          <a:lstStyle/>
+          <a:p>
+            <a:pPr algn="l"/>
+            <a:r>
+              <a:rPr sz="850" b="0">
+                <a:solidFill>
+                  <a:srgbClr val="5D5A72"/>
+                </a:solidFill>
+                <a:latin typeface="Calibri"/>
+              </a:rPr>
+              <a:t>Stated model, per account: 9 min finding a trigger, 4 min drafting, 2 min reviewing — across 13 accounts. Total 195 min manual vs 26 min with Gaia.</a:t>
+            </a:r>
+          </a:p>
+        </p:txBody>
+      </p:sp>
+    </p:spTree>
+  </p:cSld>
+  <p:clrMapOvr>
+    <a:masterClrMapping/>
+  </p:clrMapOvr>
+</p:sld>
+</file>
+
 <file path=ppt/slides/slide2.xml><?xml version="1.0" encoding="utf-8"?>
 <p:sld xmlns:a="http://schemas.openxmlformats.org/drawingml/2006/main" xmlns:r="http://schemas.openxmlformats.org/officeDocument/2006/relationships" xmlns:mc="http://schemas.openxmlformats.org/markup-compatibility/2006" xmlns:mv="urn:schemas-microsoft-com:mac:vml" xmlns:p="http://schemas.openxmlformats.org/presentationml/2006/main" xmlns:c="http://schemas.openxmlformats.org/drawingml/2006/chart" xmlns:dgm="http://schemas.openxmlformats.org/drawingml/2006/diagram" xmlns:o="urn:schemas-microsoft-com:office:office" xmlns:v="urn:schemas-microsoft-com:vml" xmlns:pvml="urn:schemas-microsoft-com:office:powerpoint" xmlns:com="http://schemas.openxmlformats.org/drawingml/2006/compatibility" xmlns:p14="http://schemas.microsoft.com/office/powerpoint/2010/main" xmlns:p15="http://schemas.microsoft.com/office/powerpoint/2012/main" xmlns:ahyp="http://schemas.microsoft.com/office/drawing/2018/hyperlinkcolor">
   <p:cSld>
@@ -22381,6 +24863,3271 @@
               <a:t>6</a:t>
             </a:r>
             <a:endParaRPr sz="1100"/>
+          </a:p>
+        </p:txBody>
+      </p:sp>
+    </p:spTree>
+  </p:cSld>
+  <p:clrMapOvr>
+    <a:masterClrMapping/>
+  </p:clrMapOvr>
+</p:sld>
+</file>
+
+<file path=ppt/slides/slide7.xml><?xml version="1.0" encoding="utf-8"?>
+<p:sld xmlns:a="http://schemas.openxmlformats.org/drawingml/2006/main" xmlns:p="http://schemas.openxmlformats.org/presentationml/2006/main" xmlns:r="http://schemas.openxmlformats.org/officeDocument/2006/relationships">
+  <p:cSld>
+    <p:spTree>
+      <p:nvGrpSpPr>
+        <p:cNvPr id="1" name=""/>
+        <p:cNvGrpSpPr/>
+        <p:nvPr/>
+      </p:nvGrpSpPr>
+      <p:grpSpPr/>
+      <p:sp>
+        <p:nvSpPr>
+          <p:cNvPr id="2" name="Rectangle 1"/>
+          <p:cNvSpPr/>
+          <p:nvPr/>
+        </p:nvSpPr>
+        <p:spPr>
+          <a:xfrm>
+            <a:off x="0" y="0"/>
+            <a:ext cx="9144000" cy="5138928"/>
+          </a:xfrm>
+          <a:prstGeom prst="rect">
+            <a:avLst/>
+          </a:prstGeom>
+          <a:solidFill>
+            <a:srgbClr val="FFFFFF"/>
+          </a:solidFill>
+          <a:ln>
+            <a:noFill/>
+          </a:ln>
+          <a:effectLst/>
+        </p:spPr>
+        <p:style>
+          <a:lnRef idx="1">
+            <a:schemeClr val="accent1"/>
+          </a:lnRef>
+          <a:fillRef idx="3">
+            <a:schemeClr val="accent1"/>
+          </a:fillRef>
+          <a:effectRef idx="2">
+            <a:schemeClr val="accent1"/>
+          </a:effectRef>
+          <a:fontRef idx="minor">
+            <a:schemeClr val="lt1"/>
+          </a:fontRef>
+        </p:style>
+        <p:txBody>
+          <a:bodyPr rtlCol="0" anchor="ctr"/>
+          <a:lstStyle/>
+          <a:p>
+            <a:pPr algn="ctr"/>
+          </a:p>
+        </p:txBody>
+      </p:sp>
+      <p:sp>
+        <p:nvSpPr>
+          <p:cNvPr id="3" name="Rectangle 2"/>
+          <p:cNvSpPr/>
+          <p:nvPr/>
+        </p:nvSpPr>
+        <p:spPr>
+          <a:xfrm>
+            <a:off x="411480" y="374904"/>
+            <a:ext cx="64008" cy="219456"/>
+          </a:xfrm>
+          <a:prstGeom prst="rect">
+            <a:avLst/>
+          </a:prstGeom>
+          <a:solidFill>
+            <a:srgbClr val="5422FF"/>
+          </a:solidFill>
+          <a:ln>
+            <a:noFill/>
+          </a:ln>
+          <a:effectLst/>
+        </p:spPr>
+        <p:style>
+          <a:lnRef idx="1">
+            <a:schemeClr val="accent1"/>
+          </a:lnRef>
+          <a:fillRef idx="3">
+            <a:schemeClr val="accent1"/>
+          </a:fillRef>
+          <a:effectRef idx="2">
+            <a:schemeClr val="accent1"/>
+          </a:effectRef>
+          <a:fontRef idx="minor">
+            <a:schemeClr val="lt1"/>
+          </a:fontRef>
+        </p:style>
+        <p:txBody>
+          <a:bodyPr rtlCol="0" anchor="ctr"/>
+          <a:lstStyle/>
+          <a:p>
+            <a:pPr algn="ctr"/>
+          </a:p>
+        </p:txBody>
+      </p:sp>
+      <p:sp>
+        <p:nvSpPr>
+          <p:cNvPr id="4" name="TextBox 3"/>
+          <p:cNvSpPr txBox="1"/>
+          <p:nvPr/>
+        </p:nvSpPr>
+        <p:spPr>
+          <a:xfrm>
+            <a:off x="566928" y="329184"/>
+            <a:ext cx="4114800" cy="274320"/>
+          </a:xfrm>
+          <a:prstGeom prst="rect">
+            <a:avLst/>
+          </a:prstGeom>
+          <a:noFill/>
+        </p:spPr>
+        <p:txBody>
+          <a:bodyPr wrap="square" lIns="0" rIns="0" tIns="0" bIns="0" anchor="t">
+            <a:spAutoFit/>
+          </a:bodyPr>
+          <a:lstStyle/>
+          <a:p>
+            <a:pPr algn="l"/>
+            <a:r>
+              <a:rPr sz="1250" b="1">
+                <a:solidFill>
+                  <a:srgbClr val="5422FF"/>
+                </a:solidFill>
+                <a:latin typeface="Calibri"/>
+              </a:rPr>
+              <a:t>CRITERION 1 — FITS THEME</a:t>
+            </a:r>
+          </a:p>
+        </p:txBody>
+      </p:sp>
+      <p:sp>
+        <p:nvSpPr>
+          <p:cNvPr id="5" name="TextBox 4"/>
+          <p:cNvSpPr txBox="1"/>
+          <p:nvPr/>
+        </p:nvSpPr>
+        <p:spPr>
+          <a:xfrm>
+            <a:off x="411480" y="621792"/>
+            <a:ext cx="7891272" cy="484632"/>
+          </a:xfrm>
+          <a:prstGeom prst="rect">
+            <a:avLst/>
+          </a:prstGeom>
+          <a:noFill/>
+        </p:spPr>
+        <p:txBody>
+          <a:bodyPr wrap="square" lIns="0" rIns="0" tIns="0" bIns="0" anchor="t">
+            <a:spAutoFit/>
+          </a:bodyPr>
+          <a:lstStyle/>
+          <a:p>
+            <a:pPr algn="l"/>
+            <a:r>
+              <a:rPr sz="2900" b="1">
+                <a:solidFill>
+                  <a:srgbClr val="1C153E"/>
+                </a:solidFill>
+                <a:latin typeface="Calibri"/>
+              </a:rPr>
+              <a:t>Agents decide; every signal is an API call</a:t>
+            </a:r>
+          </a:p>
+        </p:txBody>
+      </p:sp>
+      <p:sp>
+        <p:nvSpPr>
+          <p:cNvPr id="6" name="TextBox 5"/>
+          <p:cNvSpPr txBox="1"/>
+          <p:nvPr/>
+        </p:nvSpPr>
+        <p:spPr>
+          <a:xfrm>
+            <a:off x="411480" y="1060704"/>
+            <a:ext cx="7818120" cy="347472"/>
+          </a:xfrm>
+          <a:prstGeom prst="rect">
+            <a:avLst/>
+          </a:prstGeom>
+          <a:noFill/>
+        </p:spPr>
+        <p:txBody>
+          <a:bodyPr wrap="square" lIns="0" rIns="0" tIns="0" bIns="0" anchor="t">
+            <a:spAutoFit/>
+          </a:bodyPr>
+          <a:lstStyle/>
+          <a:p>
+            <a:pPr algn="l"/>
+            <a:r>
+              <a:rPr sz="1400" b="0">
+                <a:solidFill>
+                  <a:srgbClr val="5D5A72"/>
+                </a:solidFill>
+                <a:latin typeface="Calibri"/>
+              </a:rPr>
+              <a:t>Not a dashboard with an LLM bolted on — the deciding is done by agents, and the data is all API.</a:t>
+            </a:r>
+          </a:p>
+        </p:txBody>
+      </p:sp>
+      <p:sp>
+        <p:nvSpPr>
+          <p:cNvPr id="7" name="TextBox 6"/>
+          <p:cNvSpPr txBox="1"/>
+          <p:nvPr/>
+        </p:nvSpPr>
+        <p:spPr>
+          <a:xfrm>
+            <a:off x="411480" y="4855464"/>
+            <a:ext cx="4114800" cy="210312"/>
+          </a:xfrm>
+          <a:prstGeom prst="rect">
+            <a:avLst/>
+          </a:prstGeom>
+          <a:noFill/>
+        </p:spPr>
+        <p:txBody>
+          <a:bodyPr wrap="square" lIns="0" rIns="0" tIns="0" bIns="0" anchor="t">
+            <a:spAutoFit/>
+          </a:bodyPr>
+          <a:lstStyle/>
+          <a:p>
+            <a:pPr algn="l"/>
+            <a:r>
+              <a:rPr sz="1000" b="0">
+                <a:solidFill>
+                  <a:srgbClr val="5D5A72"/>
+                </a:solidFill>
+                <a:latin typeface="Calibri"/>
+              </a:rPr>
+              <a:t>Gaia ARR Growth Agent</a:t>
+            </a:r>
+          </a:p>
+        </p:txBody>
+      </p:sp>
+      <p:sp>
+        <p:nvSpPr>
+          <p:cNvPr id="8" name="TextBox 7"/>
+          <p:cNvSpPr txBox="1"/>
+          <p:nvPr/>
+        </p:nvSpPr>
+        <p:spPr>
+          <a:xfrm>
+            <a:off x="8229600" y="4855464"/>
+            <a:ext cx="484632" cy="210312"/>
+          </a:xfrm>
+          <a:prstGeom prst="rect">
+            <a:avLst/>
+          </a:prstGeom>
+          <a:noFill/>
+        </p:spPr>
+        <p:txBody>
+          <a:bodyPr wrap="square" lIns="0" rIns="0" tIns="0" bIns="0" anchor="t">
+            <a:spAutoFit/>
+          </a:bodyPr>
+          <a:lstStyle/>
+          <a:p>
+            <a:pPr algn="l"/>
+            <a:r>
+              <a:rPr sz="1000" b="0">
+                <a:solidFill>
+                  <a:srgbClr val="5D5A72"/>
+                </a:solidFill>
+                <a:latin typeface="Calibri"/>
+              </a:rPr>
+              <a:t>7</a:t>
+            </a:r>
+          </a:p>
+        </p:txBody>
+      </p:sp>
+      <p:sp>
+        <p:nvSpPr>
+          <p:cNvPr id="9" name="Rectangle 8"/>
+          <p:cNvSpPr/>
+          <p:nvPr/>
+        </p:nvSpPr>
+        <p:spPr>
+          <a:xfrm>
+            <a:off x="411480" y="1609344"/>
+            <a:ext cx="7955279" cy="649224"/>
+          </a:xfrm>
+          <a:prstGeom prst="rect">
+            <a:avLst/>
+          </a:prstGeom>
+          <a:solidFill>
+            <a:srgbClr val="F7F5FF"/>
+          </a:solidFill>
+          <a:ln>
+            <a:noFill/>
+          </a:ln>
+          <a:effectLst/>
+        </p:spPr>
+        <p:style>
+          <a:lnRef idx="1">
+            <a:schemeClr val="accent1"/>
+          </a:lnRef>
+          <a:fillRef idx="3">
+            <a:schemeClr val="accent1"/>
+          </a:fillRef>
+          <a:effectRef idx="2">
+            <a:schemeClr val="accent1"/>
+          </a:effectRef>
+          <a:fontRef idx="minor">
+            <a:schemeClr val="lt1"/>
+          </a:fontRef>
+        </p:style>
+        <p:txBody>
+          <a:bodyPr rtlCol="0" anchor="ctr"/>
+          <a:lstStyle/>
+          <a:p>
+            <a:pPr algn="ctr"/>
+          </a:p>
+        </p:txBody>
+      </p:sp>
+      <p:sp>
+        <p:nvSpPr>
+          <p:cNvPr id="10" name="Rectangle 9"/>
+          <p:cNvSpPr/>
+          <p:nvPr/>
+        </p:nvSpPr>
+        <p:spPr>
+          <a:xfrm>
+            <a:off x="411480" y="1609344"/>
+            <a:ext cx="82296" cy="649224"/>
+          </a:xfrm>
+          <a:prstGeom prst="rect">
+            <a:avLst/>
+          </a:prstGeom>
+          <a:solidFill>
+            <a:srgbClr val="5422FF"/>
+          </a:solidFill>
+          <a:ln>
+            <a:noFill/>
+          </a:ln>
+          <a:effectLst/>
+        </p:spPr>
+        <p:style>
+          <a:lnRef idx="1">
+            <a:schemeClr val="accent1"/>
+          </a:lnRef>
+          <a:fillRef idx="3">
+            <a:schemeClr val="accent1"/>
+          </a:fillRef>
+          <a:effectRef idx="2">
+            <a:schemeClr val="accent1"/>
+          </a:effectRef>
+          <a:fontRef idx="minor">
+            <a:schemeClr val="lt1"/>
+          </a:fontRef>
+        </p:style>
+        <p:txBody>
+          <a:bodyPr rtlCol="0" anchor="ctr"/>
+          <a:lstStyle/>
+          <a:p>
+            <a:pPr algn="ctr"/>
+          </a:p>
+        </p:txBody>
+      </p:sp>
+      <p:sp>
+        <p:nvSpPr>
+          <p:cNvPr id="11" name="TextBox 10"/>
+          <p:cNvSpPr txBox="1"/>
+          <p:nvPr/>
+        </p:nvSpPr>
+        <p:spPr>
+          <a:xfrm>
+            <a:off x="649224" y="1700784"/>
+            <a:ext cx="2057400" cy="484632"/>
+          </a:xfrm>
+          <a:prstGeom prst="rect">
+            <a:avLst/>
+          </a:prstGeom>
+          <a:noFill/>
+        </p:spPr>
+        <p:txBody>
+          <a:bodyPr wrap="square" lIns="0" rIns="0" tIns="0" bIns="0" anchor="ctr">
+            <a:spAutoFit/>
+          </a:bodyPr>
+          <a:lstStyle/>
+          <a:p>
+            <a:pPr algn="l"/>
+            <a:r>
+              <a:rPr sz="1300" b="1">
+                <a:solidFill>
+                  <a:srgbClr val="1C153E"/>
+                </a:solidFill>
+                <a:latin typeface="Calibri"/>
+              </a:rPr>
+              <a:t>Agentic</a:t>
+            </a:r>
+          </a:p>
+        </p:txBody>
+      </p:sp>
+      <p:sp>
+        <p:nvSpPr>
+          <p:cNvPr id="12" name="TextBox 11"/>
+          <p:cNvSpPr txBox="1"/>
+          <p:nvPr/>
+        </p:nvSpPr>
+        <p:spPr>
+          <a:xfrm>
+            <a:off x="2816352" y="1700784"/>
+            <a:ext cx="5422392" cy="484632"/>
+          </a:xfrm>
+          <a:prstGeom prst="rect">
+            <a:avLst/>
+          </a:prstGeom>
+          <a:noFill/>
+        </p:spPr>
+        <p:txBody>
+          <a:bodyPr wrap="square" lIns="0" rIns="0" tIns="0" bIns="0" anchor="ctr">
+            <a:spAutoFit/>
+          </a:bodyPr>
+          <a:lstStyle/>
+          <a:p>
+            <a:pPr algn="l"/>
+            <a:r>
+              <a:rPr sz="1150" b="0">
+                <a:solidFill>
+                  <a:srgbClr val="5D5A72"/>
+                </a:solidFill>
+                <a:latin typeface="Calibri"/>
+              </a:rPr>
+              <a:t>A daily agent runs unattended and judges which stories are real events. Over MCP, an agent chooses which accounts to examine — surveying 13, drilling into 2–3.</a:t>
+            </a:r>
+          </a:p>
+        </p:txBody>
+      </p:sp>
+      <p:sp>
+        <p:nvSpPr>
+          <p:cNvPr id="13" name="Rectangle 12"/>
+          <p:cNvSpPr/>
+          <p:nvPr/>
+        </p:nvSpPr>
+        <p:spPr>
+          <a:xfrm>
+            <a:off x="411480" y="2386584"/>
+            <a:ext cx="7955279" cy="649224"/>
+          </a:xfrm>
+          <a:prstGeom prst="rect">
+            <a:avLst/>
+          </a:prstGeom>
+          <a:solidFill>
+            <a:srgbClr val="F7F5FF"/>
+          </a:solidFill>
+          <a:ln>
+            <a:noFill/>
+          </a:ln>
+          <a:effectLst/>
+        </p:spPr>
+        <p:style>
+          <a:lnRef idx="1">
+            <a:schemeClr val="accent1"/>
+          </a:lnRef>
+          <a:fillRef idx="3">
+            <a:schemeClr val="accent1"/>
+          </a:fillRef>
+          <a:effectRef idx="2">
+            <a:schemeClr val="accent1"/>
+          </a:effectRef>
+          <a:fontRef idx="minor">
+            <a:schemeClr val="lt1"/>
+          </a:fontRef>
+        </p:style>
+        <p:txBody>
+          <a:bodyPr rtlCol="0" anchor="ctr"/>
+          <a:lstStyle/>
+          <a:p>
+            <a:pPr algn="ctr"/>
+          </a:p>
+        </p:txBody>
+      </p:sp>
+      <p:sp>
+        <p:nvSpPr>
+          <p:cNvPr id="14" name="Rectangle 13"/>
+          <p:cNvSpPr/>
+          <p:nvPr/>
+        </p:nvSpPr>
+        <p:spPr>
+          <a:xfrm>
+            <a:off x="411480" y="2386584"/>
+            <a:ext cx="82296" cy="649224"/>
+          </a:xfrm>
+          <a:prstGeom prst="rect">
+            <a:avLst/>
+          </a:prstGeom>
+          <a:solidFill>
+            <a:srgbClr val="158A5E"/>
+          </a:solidFill>
+          <a:ln>
+            <a:noFill/>
+          </a:ln>
+          <a:effectLst/>
+        </p:spPr>
+        <p:style>
+          <a:lnRef idx="1">
+            <a:schemeClr val="accent1"/>
+          </a:lnRef>
+          <a:fillRef idx="3">
+            <a:schemeClr val="accent1"/>
+          </a:fillRef>
+          <a:effectRef idx="2">
+            <a:schemeClr val="accent1"/>
+          </a:effectRef>
+          <a:fontRef idx="minor">
+            <a:schemeClr val="lt1"/>
+          </a:fontRef>
+        </p:style>
+        <p:txBody>
+          <a:bodyPr rtlCol="0" anchor="ctr"/>
+          <a:lstStyle/>
+          <a:p>
+            <a:pPr algn="ctr"/>
+          </a:p>
+        </p:txBody>
+      </p:sp>
+      <p:sp>
+        <p:nvSpPr>
+          <p:cNvPr id="15" name="TextBox 14"/>
+          <p:cNvSpPr txBox="1"/>
+          <p:nvPr/>
+        </p:nvSpPr>
+        <p:spPr>
+          <a:xfrm>
+            <a:off x="649224" y="2478024"/>
+            <a:ext cx="2057400" cy="484632"/>
+          </a:xfrm>
+          <a:prstGeom prst="rect">
+            <a:avLst/>
+          </a:prstGeom>
+          <a:noFill/>
+        </p:spPr>
+        <p:txBody>
+          <a:bodyPr wrap="square" lIns="0" rIns="0" tIns="0" bIns="0" anchor="ctr">
+            <a:spAutoFit/>
+          </a:bodyPr>
+          <a:lstStyle/>
+          <a:p>
+            <a:pPr algn="l"/>
+            <a:r>
+              <a:rPr sz="1300" b="1">
+                <a:solidFill>
+                  <a:srgbClr val="1C153E"/>
+                </a:solidFill>
+                <a:latin typeface="Calibri"/>
+              </a:rPr>
+              <a:t>API-first</a:t>
+            </a:r>
+          </a:p>
+        </p:txBody>
+      </p:sp>
+      <p:sp>
+        <p:nvSpPr>
+          <p:cNvPr id="16" name="TextBox 15"/>
+          <p:cNvSpPr txBox="1"/>
+          <p:nvPr/>
+        </p:nvSpPr>
+        <p:spPr>
+          <a:xfrm>
+            <a:off x="2816352" y="2478024"/>
+            <a:ext cx="5422392" cy="484632"/>
+          </a:xfrm>
+          <a:prstGeom prst="rect">
+            <a:avLst/>
+          </a:prstGeom>
+          <a:noFill/>
+        </p:spPr>
+        <p:txBody>
+          <a:bodyPr wrap="square" lIns="0" rIns="0" tIns="0" bIns="0" anchor="ctr">
+            <a:spAutoFit/>
+          </a:bodyPr>
+          <a:lstStyle/>
+          <a:p>
+            <a:pPr algn="l"/>
+            <a:r>
+              <a:rPr sz="1150" b="0">
+                <a:solidFill>
+                  <a:srgbClr val="5D5A72"/>
+                </a:solidFill>
+                <a:latin typeface="Calibri"/>
+              </a:rPr>
+              <a:t>Scores, history and third-party supplier risk all come from SecurityScorecard APIs. No SSC frontend is involved anywhere in the product.</a:t>
+            </a:r>
+          </a:p>
+        </p:txBody>
+      </p:sp>
+      <p:sp>
+        <p:nvSpPr>
+          <p:cNvPr id="17" name="Rectangle 16"/>
+          <p:cNvSpPr/>
+          <p:nvPr/>
+        </p:nvSpPr>
+        <p:spPr>
+          <a:xfrm>
+            <a:off x="411480" y="3163824"/>
+            <a:ext cx="7955279" cy="649224"/>
+          </a:xfrm>
+          <a:prstGeom prst="rect">
+            <a:avLst/>
+          </a:prstGeom>
+          <a:solidFill>
+            <a:srgbClr val="F7F5FF"/>
+          </a:solidFill>
+          <a:ln>
+            <a:noFill/>
+          </a:ln>
+          <a:effectLst/>
+        </p:spPr>
+        <p:style>
+          <a:lnRef idx="1">
+            <a:schemeClr val="accent1"/>
+          </a:lnRef>
+          <a:fillRef idx="3">
+            <a:schemeClr val="accent1"/>
+          </a:fillRef>
+          <a:effectRef idx="2">
+            <a:schemeClr val="accent1"/>
+          </a:effectRef>
+          <a:fontRef idx="minor">
+            <a:schemeClr val="lt1"/>
+          </a:fontRef>
+        </p:style>
+        <p:txBody>
+          <a:bodyPr rtlCol="0" anchor="ctr"/>
+          <a:lstStyle/>
+          <a:p>
+            <a:pPr algn="ctr"/>
+          </a:p>
+        </p:txBody>
+      </p:sp>
+      <p:sp>
+        <p:nvSpPr>
+          <p:cNvPr id="18" name="Rectangle 17"/>
+          <p:cNvSpPr/>
+          <p:nvPr/>
+        </p:nvSpPr>
+        <p:spPr>
+          <a:xfrm>
+            <a:off x="411480" y="3163824"/>
+            <a:ext cx="82296" cy="649224"/>
+          </a:xfrm>
+          <a:prstGeom prst="rect">
+            <a:avLst/>
+          </a:prstGeom>
+          <a:solidFill>
+            <a:srgbClr val="D98E2B"/>
+          </a:solidFill>
+          <a:ln>
+            <a:noFill/>
+          </a:ln>
+          <a:effectLst/>
+        </p:spPr>
+        <p:style>
+          <a:lnRef idx="1">
+            <a:schemeClr val="accent1"/>
+          </a:lnRef>
+          <a:fillRef idx="3">
+            <a:schemeClr val="accent1"/>
+          </a:fillRef>
+          <a:effectRef idx="2">
+            <a:schemeClr val="accent1"/>
+          </a:effectRef>
+          <a:fontRef idx="minor">
+            <a:schemeClr val="lt1"/>
+          </a:fontRef>
+        </p:style>
+        <p:txBody>
+          <a:bodyPr rtlCol="0" anchor="ctr"/>
+          <a:lstStyle/>
+          <a:p>
+            <a:pPr algn="ctr"/>
+          </a:p>
+        </p:txBody>
+      </p:sp>
+      <p:sp>
+        <p:nvSpPr>
+          <p:cNvPr id="19" name="TextBox 18"/>
+          <p:cNvSpPr txBox="1"/>
+          <p:nvPr/>
+        </p:nvSpPr>
+        <p:spPr>
+          <a:xfrm>
+            <a:off x="649224" y="3255264"/>
+            <a:ext cx="2057400" cy="484632"/>
+          </a:xfrm>
+          <a:prstGeom prst="rect">
+            <a:avLst/>
+          </a:prstGeom>
+          <a:noFill/>
+        </p:spPr>
+        <p:txBody>
+          <a:bodyPr wrap="square" lIns="0" rIns="0" tIns="0" bIns="0" anchor="ctr">
+            <a:spAutoFit/>
+          </a:bodyPr>
+          <a:lstStyle/>
+          <a:p>
+            <a:pPr algn="l"/>
+            <a:r>
+              <a:rPr sz="1300" b="1">
+                <a:solidFill>
+                  <a:srgbClr val="1C153E"/>
+                </a:solidFill>
+                <a:latin typeface="Calibri"/>
+              </a:rPr>
+              <a:t>No UI required</a:t>
+            </a:r>
+          </a:p>
+        </p:txBody>
+      </p:sp>
+      <p:sp>
+        <p:nvSpPr>
+          <p:cNvPr id="20" name="TextBox 19"/>
+          <p:cNvSpPr txBox="1"/>
+          <p:nvPr/>
+        </p:nvSpPr>
+        <p:spPr>
+          <a:xfrm>
+            <a:off x="2816352" y="3255264"/>
+            <a:ext cx="5422392" cy="484632"/>
+          </a:xfrm>
+          <a:prstGeom prst="rect">
+            <a:avLst/>
+          </a:prstGeom>
+          <a:noFill/>
+        </p:spPr>
+        <p:txBody>
+          <a:bodyPr wrap="square" lIns="0" rIns="0" tIns="0" bIns="0" anchor="ctr">
+            <a:spAutoFit/>
+          </a:bodyPr>
+          <a:lstStyle/>
+          <a:p>
+            <a:pPr algn="l"/>
+            <a:r>
+              <a:rPr sz="1150" b="0">
+                <a:solidFill>
+                  <a:srgbClr val="5D5A72"/>
+                </a:solidFill>
+                <a:latin typeface="Calibri"/>
+              </a:rPr>
+              <a:t>An MCP server exposes the same four portfolio tools to any MCP client, so a CSM can work the whole portfolio from Claude Desktop with no interface of ours at all.</a:t>
+            </a:r>
+          </a:p>
+        </p:txBody>
+      </p:sp>
+      <p:sp>
+        <p:nvSpPr>
+          <p:cNvPr id="21" name="Rectangle 20"/>
+          <p:cNvSpPr/>
+          <p:nvPr/>
+        </p:nvSpPr>
+        <p:spPr>
+          <a:xfrm>
+            <a:off x="411480" y="3941063"/>
+            <a:ext cx="7955279" cy="649224"/>
+          </a:xfrm>
+          <a:prstGeom prst="rect">
+            <a:avLst/>
+          </a:prstGeom>
+          <a:solidFill>
+            <a:srgbClr val="F7F5FF"/>
+          </a:solidFill>
+          <a:ln>
+            <a:noFill/>
+          </a:ln>
+          <a:effectLst/>
+        </p:spPr>
+        <p:style>
+          <a:lnRef idx="1">
+            <a:schemeClr val="accent1"/>
+          </a:lnRef>
+          <a:fillRef idx="3">
+            <a:schemeClr val="accent1"/>
+          </a:fillRef>
+          <a:effectRef idx="2">
+            <a:schemeClr val="accent1"/>
+          </a:effectRef>
+          <a:fontRef idx="minor">
+            <a:schemeClr val="lt1"/>
+          </a:fontRef>
+        </p:style>
+        <p:txBody>
+          <a:bodyPr rtlCol="0" anchor="ctr"/>
+          <a:lstStyle/>
+          <a:p>
+            <a:pPr algn="ctr"/>
+          </a:p>
+        </p:txBody>
+      </p:sp>
+      <p:sp>
+        <p:nvSpPr>
+          <p:cNvPr id="22" name="Rectangle 21"/>
+          <p:cNvSpPr/>
+          <p:nvPr/>
+        </p:nvSpPr>
+        <p:spPr>
+          <a:xfrm>
+            <a:off x="411480" y="3941063"/>
+            <a:ext cx="82296" cy="649224"/>
+          </a:xfrm>
+          <a:prstGeom prst="rect">
+            <a:avLst/>
+          </a:prstGeom>
+          <a:solidFill>
+            <a:srgbClr val="5D5A72"/>
+          </a:solidFill>
+          <a:ln>
+            <a:noFill/>
+          </a:ln>
+          <a:effectLst/>
+        </p:spPr>
+        <p:style>
+          <a:lnRef idx="1">
+            <a:schemeClr val="accent1"/>
+          </a:lnRef>
+          <a:fillRef idx="3">
+            <a:schemeClr val="accent1"/>
+          </a:fillRef>
+          <a:effectRef idx="2">
+            <a:schemeClr val="accent1"/>
+          </a:effectRef>
+          <a:fontRef idx="minor">
+            <a:schemeClr val="lt1"/>
+          </a:fontRef>
+        </p:style>
+        <p:txBody>
+          <a:bodyPr rtlCol="0" anchor="ctr"/>
+          <a:lstStyle/>
+          <a:p>
+            <a:pPr algn="ctr"/>
+          </a:p>
+        </p:txBody>
+      </p:sp>
+      <p:sp>
+        <p:nvSpPr>
+          <p:cNvPr id="23" name="TextBox 22"/>
+          <p:cNvSpPr txBox="1"/>
+          <p:nvPr/>
+        </p:nvSpPr>
+        <p:spPr>
+          <a:xfrm>
+            <a:off x="649224" y="4032503"/>
+            <a:ext cx="2057400" cy="484632"/>
+          </a:xfrm>
+          <a:prstGeom prst="rect">
+            <a:avLst/>
+          </a:prstGeom>
+          <a:noFill/>
+        </p:spPr>
+        <p:txBody>
+          <a:bodyPr wrap="square" lIns="0" rIns="0" tIns="0" bIns="0" anchor="ctr">
+            <a:spAutoFit/>
+          </a:bodyPr>
+          <a:lstStyle/>
+          <a:p>
+            <a:pPr algn="l"/>
+            <a:r>
+              <a:rPr sz="1300" b="1">
+                <a:solidFill>
+                  <a:srgbClr val="1C153E"/>
+                </a:solidFill>
+                <a:latin typeface="Calibri"/>
+              </a:rPr>
+              <a:t>Workflow reimagined</a:t>
+            </a:r>
+          </a:p>
+        </p:txBody>
+      </p:sp>
+      <p:sp>
+        <p:nvSpPr>
+          <p:cNvPr id="24" name="TextBox 23"/>
+          <p:cNvSpPr txBox="1"/>
+          <p:nvPr/>
+        </p:nvSpPr>
+        <p:spPr>
+          <a:xfrm>
+            <a:off x="2816352" y="4032503"/>
+            <a:ext cx="5422392" cy="484632"/>
+          </a:xfrm>
+          <a:prstGeom prst="rect">
+            <a:avLst/>
+          </a:prstGeom>
+          <a:noFill/>
+        </p:spPr>
+        <p:txBody>
+          <a:bodyPr wrap="square" lIns="0" rIns="0" tIns="0" bIns="0" anchor="ctr">
+            <a:spAutoFit/>
+          </a:bodyPr>
+          <a:lstStyle/>
+          <a:p>
+            <a:pPr algn="l"/>
+            <a:r>
+              <a:rPr sz="1150" b="0">
+                <a:solidFill>
+                  <a:srgbClr val="5D5A72"/>
+                </a:solidFill>
+                <a:latin typeface="Calibri"/>
+              </a:rPr>
+              <a:t>Before: a CSM opens each account and hunts for a reason to call. After: the reason finds them, with the email already drafted and the source article attached.</a:t>
+            </a:r>
+          </a:p>
+        </p:txBody>
+      </p:sp>
+    </p:spTree>
+  </p:cSld>
+  <p:clrMapOvr>
+    <a:masterClrMapping/>
+  </p:clrMapOvr>
+</p:sld>
+</file>
+
+<file path=ppt/slides/slide8.xml><?xml version="1.0" encoding="utf-8"?>
+<p:sld xmlns:a="http://schemas.openxmlformats.org/drawingml/2006/main" xmlns:p="http://schemas.openxmlformats.org/presentationml/2006/main" xmlns:r="http://schemas.openxmlformats.org/officeDocument/2006/relationships">
+  <p:cSld>
+    <p:spTree>
+      <p:nvGrpSpPr>
+        <p:cNvPr id="1" name=""/>
+        <p:cNvGrpSpPr/>
+        <p:nvPr/>
+      </p:nvGrpSpPr>
+      <p:grpSpPr/>
+      <p:sp>
+        <p:nvSpPr>
+          <p:cNvPr id="2" name="Rectangle 1"/>
+          <p:cNvSpPr/>
+          <p:nvPr/>
+        </p:nvSpPr>
+        <p:spPr>
+          <a:xfrm>
+            <a:off x="0" y="0"/>
+            <a:ext cx="9144000" cy="5138928"/>
+          </a:xfrm>
+          <a:prstGeom prst="rect">
+            <a:avLst/>
+          </a:prstGeom>
+          <a:solidFill>
+            <a:srgbClr val="FFFFFF"/>
+          </a:solidFill>
+          <a:ln>
+            <a:noFill/>
+          </a:ln>
+          <a:effectLst/>
+        </p:spPr>
+        <p:style>
+          <a:lnRef idx="1">
+            <a:schemeClr val="accent1"/>
+          </a:lnRef>
+          <a:fillRef idx="3">
+            <a:schemeClr val="accent1"/>
+          </a:fillRef>
+          <a:effectRef idx="2">
+            <a:schemeClr val="accent1"/>
+          </a:effectRef>
+          <a:fontRef idx="minor">
+            <a:schemeClr val="lt1"/>
+          </a:fontRef>
+        </p:style>
+        <p:txBody>
+          <a:bodyPr rtlCol="0" anchor="ctr"/>
+          <a:lstStyle/>
+          <a:p>
+            <a:pPr algn="ctr"/>
+          </a:p>
+        </p:txBody>
+      </p:sp>
+      <p:sp>
+        <p:nvSpPr>
+          <p:cNvPr id="3" name="Rectangle 2"/>
+          <p:cNvSpPr/>
+          <p:nvPr/>
+        </p:nvSpPr>
+        <p:spPr>
+          <a:xfrm>
+            <a:off x="411480" y="374904"/>
+            <a:ext cx="64008" cy="219456"/>
+          </a:xfrm>
+          <a:prstGeom prst="rect">
+            <a:avLst/>
+          </a:prstGeom>
+          <a:solidFill>
+            <a:srgbClr val="5422FF"/>
+          </a:solidFill>
+          <a:ln>
+            <a:noFill/>
+          </a:ln>
+          <a:effectLst/>
+        </p:spPr>
+        <p:style>
+          <a:lnRef idx="1">
+            <a:schemeClr val="accent1"/>
+          </a:lnRef>
+          <a:fillRef idx="3">
+            <a:schemeClr val="accent1"/>
+          </a:fillRef>
+          <a:effectRef idx="2">
+            <a:schemeClr val="accent1"/>
+          </a:effectRef>
+          <a:fontRef idx="minor">
+            <a:schemeClr val="lt1"/>
+          </a:fontRef>
+        </p:style>
+        <p:txBody>
+          <a:bodyPr rtlCol="0" anchor="ctr"/>
+          <a:lstStyle/>
+          <a:p>
+            <a:pPr algn="ctr"/>
+          </a:p>
+        </p:txBody>
+      </p:sp>
+      <p:sp>
+        <p:nvSpPr>
+          <p:cNvPr id="4" name="TextBox 3"/>
+          <p:cNvSpPr txBox="1"/>
+          <p:nvPr/>
+        </p:nvSpPr>
+        <p:spPr>
+          <a:xfrm>
+            <a:off x="566928" y="329184"/>
+            <a:ext cx="4114800" cy="274320"/>
+          </a:xfrm>
+          <a:prstGeom prst="rect">
+            <a:avLst/>
+          </a:prstGeom>
+          <a:noFill/>
+        </p:spPr>
+        <p:txBody>
+          <a:bodyPr wrap="square" lIns="0" rIns="0" tIns="0" bIns="0" anchor="t">
+            <a:spAutoFit/>
+          </a:bodyPr>
+          <a:lstStyle/>
+          <a:p>
+            <a:pPr algn="l"/>
+            <a:r>
+              <a:rPr sz="1250" b="1">
+                <a:solidFill>
+                  <a:srgbClr val="5422FF"/>
+                </a:solidFill>
+                <a:latin typeface="Calibri"/>
+              </a:rPr>
+              <a:t>CRITERION 2 — PRACTICALITY</a:t>
+            </a:r>
+          </a:p>
+        </p:txBody>
+      </p:sp>
+      <p:sp>
+        <p:nvSpPr>
+          <p:cNvPr id="5" name="TextBox 4"/>
+          <p:cNvSpPr txBox="1"/>
+          <p:nvPr/>
+        </p:nvSpPr>
+        <p:spPr>
+          <a:xfrm>
+            <a:off x="411480" y="621792"/>
+            <a:ext cx="7891272" cy="484632"/>
+          </a:xfrm>
+          <a:prstGeom prst="rect">
+            <a:avLst/>
+          </a:prstGeom>
+          <a:noFill/>
+        </p:spPr>
+        <p:txBody>
+          <a:bodyPr wrap="square" lIns="0" rIns="0" tIns="0" bIns="0" anchor="t">
+            <a:spAutoFit/>
+          </a:bodyPr>
+          <a:lstStyle/>
+          <a:p>
+            <a:pPr algn="l"/>
+            <a:r>
+              <a:rPr sz="2900" b="1">
+                <a:solidFill>
+                  <a:srgbClr val="1C153E"/>
+                </a:solidFill>
+                <a:latin typeface="Calibri"/>
+              </a:rPr>
+              <a:t>Built to save the hours CSMs already lose</a:t>
+            </a:r>
+          </a:p>
+        </p:txBody>
+      </p:sp>
+      <p:sp>
+        <p:nvSpPr>
+          <p:cNvPr id="6" name="TextBox 5"/>
+          <p:cNvSpPr txBox="1"/>
+          <p:nvPr/>
+        </p:nvSpPr>
+        <p:spPr>
+          <a:xfrm>
+            <a:off x="411480" y="1060704"/>
+            <a:ext cx="7818120" cy="347472"/>
+          </a:xfrm>
+          <a:prstGeom prst="rect">
+            <a:avLst/>
+          </a:prstGeom>
+          <a:noFill/>
+        </p:spPr>
+        <p:txBody>
+          <a:bodyPr wrap="square" lIns="0" rIns="0" tIns="0" bIns="0" anchor="t">
+            <a:spAutoFit/>
+          </a:bodyPr>
+          <a:lstStyle/>
+          <a:p>
+            <a:pPr algn="l"/>
+            <a:r>
+              <a:rPr sz="1400" b="0">
+                <a:solidFill>
+                  <a:srgbClr val="5D5A72"/>
+                </a:solidFill>
+                <a:latin typeface="Calibri"/>
+              </a:rPr>
+              <a:t>SMART goal: cut weekly portfolio review from a half-day sweep to a 25-minute pass, per CSM.</a:t>
+            </a:r>
+          </a:p>
+        </p:txBody>
+      </p:sp>
+      <p:sp>
+        <p:nvSpPr>
+          <p:cNvPr id="7" name="TextBox 6"/>
+          <p:cNvSpPr txBox="1"/>
+          <p:nvPr/>
+        </p:nvSpPr>
+        <p:spPr>
+          <a:xfrm>
+            <a:off x="411480" y="4855464"/>
+            <a:ext cx="4114800" cy="210312"/>
+          </a:xfrm>
+          <a:prstGeom prst="rect">
+            <a:avLst/>
+          </a:prstGeom>
+          <a:noFill/>
+        </p:spPr>
+        <p:txBody>
+          <a:bodyPr wrap="square" lIns="0" rIns="0" tIns="0" bIns="0" anchor="t">
+            <a:spAutoFit/>
+          </a:bodyPr>
+          <a:lstStyle/>
+          <a:p>
+            <a:pPr algn="l"/>
+            <a:r>
+              <a:rPr sz="1000" b="0">
+                <a:solidFill>
+                  <a:srgbClr val="5D5A72"/>
+                </a:solidFill>
+                <a:latin typeface="Calibri"/>
+              </a:rPr>
+              <a:t>Gaia ARR Growth Agent</a:t>
+            </a:r>
+          </a:p>
+        </p:txBody>
+      </p:sp>
+      <p:sp>
+        <p:nvSpPr>
+          <p:cNvPr id="8" name="TextBox 7"/>
+          <p:cNvSpPr txBox="1"/>
+          <p:nvPr/>
+        </p:nvSpPr>
+        <p:spPr>
+          <a:xfrm>
+            <a:off x="8229600" y="4855464"/>
+            <a:ext cx="484632" cy="210312"/>
+          </a:xfrm>
+          <a:prstGeom prst="rect">
+            <a:avLst/>
+          </a:prstGeom>
+          <a:noFill/>
+        </p:spPr>
+        <p:txBody>
+          <a:bodyPr wrap="square" lIns="0" rIns="0" tIns="0" bIns="0" anchor="t">
+            <a:spAutoFit/>
+          </a:bodyPr>
+          <a:lstStyle/>
+          <a:p>
+            <a:pPr algn="l"/>
+            <a:r>
+              <a:rPr sz="1000" b="0">
+                <a:solidFill>
+                  <a:srgbClr val="5D5A72"/>
+                </a:solidFill>
+                <a:latin typeface="Calibri"/>
+              </a:rPr>
+              <a:t>8</a:t>
+            </a:r>
+          </a:p>
+        </p:txBody>
+      </p:sp>
+      <p:sp>
+        <p:nvSpPr>
+          <p:cNvPr id="9" name="Rectangle 8"/>
+          <p:cNvSpPr/>
+          <p:nvPr/>
+        </p:nvSpPr>
+        <p:spPr>
+          <a:xfrm>
+            <a:off x="411480" y="1554480"/>
+            <a:ext cx="1872234" cy="960120"/>
+          </a:xfrm>
+          <a:prstGeom prst="rect">
+            <a:avLst/>
+          </a:prstGeom>
+          <a:solidFill>
+            <a:srgbClr val="F7F5FF"/>
+          </a:solidFill>
+          <a:ln>
+            <a:noFill/>
+          </a:ln>
+          <a:effectLst/>
+        </p:spPr>
+        <p:style>
+          <a:lnRef idx="1">
+            <a:schemeClr val="accent1"/>
+          </a:lnRef>
+          <a:fillRef idx="3">
+            <a:schemeClr val="accent1"/>
+          </a:fillRef>
+          <a:effectRef idx="2">
+            <a:schemeClr val="accent1"/>
+          </a:effectRef>
+          <a:fontRef idx="minor">
+            <a:schemeClr val="lt1"/>
+          </a:fontRef>
+        </p:style>
+        <p:txBody>
+          <a:bodyPr rtlCol="0" anchor="ctr"/>
+          <a:lstStyle/>
+          <a:p>
+            <a:pPr algn="ctr"/>
+          </a:p>
+        </p:txBody>
+      </p:sp>
+      <p:sp>
+        <p:nvSpPr>
+          <p:cNvPr id="10" name="TextBox 9"/>
+          <p:cNvSpPr txBox="1"/>
+          <p:nvPr/>
+        </p:nvSpPr>
+        <p:spPr>
+          <a:xfrm>
+            <a:off x="539496" y="1673352"/>
+            <a:ext cx="1616201" cy="438912"/>
+          </a:xfrm>
+          <a:prstGeom prst="rect">
+            <a:avLst/>
+          </a:prstGeom>
+          <a:noFill/>
+        </p:spPr>
+        <p:txBody>
+          <a:bodyPr wrap="square" lIns="0" rIns="0" tIns="0" bIns="0" anchor="t">
+            <a:spAutoFit/>
+          </a:bodyPr>
+          <a:lstStyle/>
+          <a:p>
+            <a:pPr algn="l"/>
+            <a:r>
+              <a:rPr sz="2600" b="1">
+                <a:solidFill>
+                  <a:srgbClr val="5422FF"/>
+                </a:solidFill>
+                <a:latin typeface="Calibri"/>
+              </a:rPr>
+              <a:t>15 → 2 min</a:t>
+            </a:r>
+          </a:p>
+        </p:txBody>
+      </p:sp>
+      <p:sp>
+        <p:nvSpPr>
+          <p:cNvPr id="11" name="TextBox 10"/>
+          <p:cNvSpPr txBox="1"/>
+          <p:nvPr/>
+        </p:nvSpPr>
+        <p:spPr>
+          <a:xfrm>
+            <a:off x="539496" y="2121408"/>
+            <a:ext cx="1616201" cy="329184"/>
+          </a:xfrm>
+          <a:prstGeom prst="rect">
+            <a:avLst/>
+          </a:prstGeom>
+          <a:noFill/>
+        </p:spPr>
+        <p:txBody>
+          <a:bodyPr wrap="square" lIns="0" rIns="0" tIns="0" bIns="0" anchor="t">
+            <a:spAutoFit/>
+          </a:bodyPr>
+          <a:lstStyle/>
+          <a:p>
+            <a:pPr algn="l"/>
+            <a:r>
+              <a:rPr sz="950" b="0">
+                <a:solidFill>
+                  <a:srgbClr val="5D5A72"/>
+                </a:solidFill>
+                <a:latin typeface="Calibri"/>
+              </a:rPr>
+              <a:t>per account reviewed</a:t>
+            </a:r>
+          </a:p>
+        </p:txBody>
+      </p:sp>
+      <p:sp>
+        <p:nvSpPr>
+          <p:cNvPr id="12" name="Rectangle 11"/>
+          <p:cNvSpPr/>
+          <p:nvPr/>
+        </p:nvSpPr>
+        <p:spPr>
+          <a:xfrm>
+            <a:off x="2439162" y="1554480"/>
+            <a:ext cx="1872234" cy="960120"/>
+          </a:xfrm>
+          <a:prstGeom prst="rect">
+            <a:avLst/>
+          </a:prstGeom>
+          <a:solidFill>
+            <a:srgbClr val="F7F5FF"/>
+          </a:solidFill>
+          <a:ln>
+            <a:noFill/>
+          </a:ln>
+          <a:effectLst/>
+        </p:spPr>
+        <p:style>
+          <a:lnRef idx="1">
+            <a:schemeClr val="accent1"/>
+          </a:lnRef>
+          <a:fillRef idx="3">
+            <a:schemeClr val="accent1"/>
+          </a:fillRef>
+          <a:effectRef idx="2">
+            <a:schemeClr val="accent1"/>
+          </a:effectRef>
+          <a:fontRef idx="minor">
+            <a:schemeClr val="lt1"/>
+          </a:fontRef>
+        </p:style>
+        <p:txBody>
+          <a:bodyPr rtlCol="0" anchor="ctr"/>
+          <a:lstStyle/>
+          <a:p>
+            <a:pPr algn="ctr"/>
+          </a:p>
+        </p:txBody>
+      </p:sp>
+      <p:sp>
+        <p:nvSpPr>
+          <p:cNvPr id="13" name="TextBox 12"/>
+          <p:cNvSpPr txBox="1"/>
+          <p:nvPr/>
+        </p:nvSpPr>
+        <p:spPr>
+          <a:xfrm>
+            <a:off x="2567178" y="1673352"/>
+            <a:ext cx="1616201" cy="438912"/>
+          </a:xfrm>
+          <a:prstGeom prst="rect">
+            <a:avLst/>
+          </a:prstGeom>
+          <a:noFill/>
+        </p:spPr>
+        <p:txBody>
+          <a:bodyPr wrap="square" lIns="0" rIns="0" tIns="0" bIns="0" anchor="t">
+            <a:spAutoFit/>
+          </a:bodyPr>
+          <a:lstStyle/>
+          <a:p>
+            <a:pPr algn="l"/>
+            <a:r>
+              <a:rPr sz="2600" b="1">
+                <a:solidFill>
+                  <a:srgbClr val="158A5E"/>
+                </a:solidFill>
+                <a:latin typeface="Calibri"/>
+              </a:rPr>
+              <a:t>~169 min</a:t>
+            </a:r>
+          </a:p>
+        </p:txBody>
+      </p:sp>
+      <p:sp>
+        <p:nvSpPr>
+          <p:cNvPr id="14" name="TextBox 13"/>
+          <p:cNvSpPr txBox="1"/>
+          <p:nvPr/>
+        </p:nvSpPr>
+        <p:spPr>
+          <a:xfrm>
+            <a:off x="2567178" y="2121408"/>
+            <a:ext cx="1616201" cy="329184"/>
+          </a:xfrm>
+          <a:prstGeom prst="rect">
+            <a:avLst/>
+          </a:prstGeom>
+          <a:noFill/>
+        </p:spPr>
+        <p:txBody>
+          <a:bodyPr wrap="square" lIns="0" rIns="0" tIns="0" bIns="0" anchor="t">
+            <a:spAutoFit/>
+          </a:bodyPr>
+          <a:lstStyle/>
+          <a:p>
+            <a:pPr algn="l"/>
+            <a:r>
+              <a:rPr sz="950" b="0">
+                <a:solidFill>
+                  <a:srgbClr val="5D5A72"/>
+                </a:solidFill>
+                <a:latin typeface="Calibri"/>
+              </a:rPr>
+              <a:t>saved per weekly sweep</a:t>
+            </a:r>
+          </a:p>
+        </p:txBody>
+      </p:sp>
+      <p:sp>
+        <p:nvSpPr>
+          <p:cNvPr id="15" name="Rectangle 14"/>
+          <p:cNvSpPr/>
+          <p:nvPr/>
+        </p:nvSpPr>
+        <p:spPr>
+          <a:xfrm>
+            <a:off x="4466844" y="1554480"/>
+            <a:ext cx="1872234" cy="960120"/>
+          </a:xfrm>
+          <a:prstGeom prst="rect">
+            <a:avLst/>
+          </a:prstGeom>
+          <a:solidFill>
+            <a:srgbClr val="F7F5FF"/>
+          </a:solidFill>
+          <a:ln>
+            <a:noFill/>
+          </a:ln>
+          <a:effectLst/>
+        </p:spPr>
+        <p:style>
+          <a:lnRef idx="1">
+            <a:schemeClr val="accent1"/>
+          </a:lnRef>
+          <a:fillRef idx="3">
+            <a:schemeClr val="accent1"/>
+          </a:fillRef>
+          <a:effectRef idx="2">
+            <a:schemeClr val="accent1"/>
+          </a:effectRef>
+          <a:fontRef idx="minor">
+            <a:schemeClr val="lt1"/>
+          </a:fontRef>
+        </p:style>
+        <p:txBody>
+          <a:bodyPr rtlCol="0" anchor="ctr"/>
+          <a:lstStyle/>
+          <a:p>
+            <a:pPr algn="ctr"/>
+          </a:p>
+        </p:txBody>
+      </p:sp>
+      <p:sp>
+        <p:nvSpPr>
+          <p:cNvPr id="16" name="TextBox 15"/>
+          <p:cNvSpPr txBox="1"/>
+          <p:nvPr/>
+        </p:nvSpPr>
+        <p:spPr>
+          <a:xfrm>
+            <a:off x="4594859" y="1673352"/>
+            <a:ext cx="1616201" cy="438912"/>
+          </a:xfrm>
+          <a:prstGeom prst="rect">
+            <a:avLst/>
+          </a:prstGeom>
+          <a:noFill/>
+        </p:spPr>
+        <p:txBody>
+          <a:bodyPr wrap="square" lIns="0" rIns="0" tIns="0" bIns="0" anchor="t">
+            <a:spAutoFit/>
+          </a:bodyPr>
+          <a:lstStyle/>
+          <a:p>
+            <a:pPr algn="l"/>
+            <a:r>
+              <a:rPr sz="2600" b="1">
+                <a:solidFill>
+                  <a:srgbClr val="D98E2B"/>
+                </a:solidFill>
+                <a:latin typeface="Calibri"/>
+              </a:rPr>
+              <a:t>~146 hrs</a:t>
+            </a:r>
+          </a:p>
+        </p:txBody>
+      </p:sp>
+      <p:sp>
+        <p:nvSpPr>
+          <p:cNvPr id="17" name="TextBox 16"/>
+          <p:cNvSpPr txBox="1"/>
+          <p:nvPr/>
+        </p:nvSpPr>
+        <p:spPr>
+          <a:xfrm>
+            <a:off x="4594859" y="2121408"/>
+            <a:ext cx="1616201" cy="329184"/>
+          </a:xfrm>
+          <a:prstGeom prst="rect">
+            <a:avLst/>
+          </a:prstGeom>
+          <a:noFill/>
+        </p:spPr>
+        <p:txBody>
+          <a:bodyPr wrap="square" lIns="0" rIns="0" tIns="0" bIns="0" anchor="t">
+            <a:spAutoFit/>
+          </a:bodyPr>
+          <a:lstStyle/>
+          <a:p>
+            <a:pPr algn="l"/>
+            <a:r>
+              <a:rPr sz="950" b="0">
+                <a:solidFill>
+                  <a:srgbClr val="5D5A72"/>
+                </a:solidFill>
+                <a:latin typeface="Calibri"/>
+              </a:rPr>
+              <a:t>per CSM per year</a:t>
+            </a:r>
+          </a:p>
+        </p:txBody>
+      </p:sp>
+      <p:sp>
+        <p:nvSpPr>
+          <p:cNvPr id="18" name="Rectangle 17"/>
+          <p:cNvSpPr/>
+          <p:nvPr/>
+        </p:nvSpPr>
+        <p:spPr>
+          <a:xfrm>
+            <a:off x="6494526" y="1554480"/>
+            <a:ext cx="1872234" cy="960120"/>
+          </a:xfrm>
+          <a:prstGeom prst="rect">
+            <a:avLst/>
+          </a:prstGeom>
+          <a:solidFill>
+            <a:srgbClr val="F7F5FF"/>
+          </a:solidFill>
+          <a:ln>
+            <a:noFill/>
+          </a:ln>
+          <a:effectLst/>
+        </p:spPr>
+        <p:style>
+          <a:lnRef idx="1">
+            <a:schemeClr val="accent1"/>
+          </a:lnRef>
+          <a:fillRef idx="3">
+            <a:schemeClr val="accent1"/>
+          </a:fillRef>
+          <a:effectRef idx="2">
+            <a:schemeClr val="accent1"/>
+          </a:effectRef>
+          <a:fontRef idx="minor">
+            <a:schemeClr val="lt1"/>
+          </a:fontRef>
+        </p:style>
+        <p:txBody>
+          <a:bodyPr rtlCol="0" anchor="ctr"/>
+          <a:lstStyle/>
+          <a:p>
+            <a:pPr algn="ctr"/>
+          </a:p>
+        </p:txBody>
+      </p:sp>
+      <p:sp>
+        <p:nvSpPr>
+          <p:cNvPr id="19" name="TextBox 18"/>
+          <p:cNvSpPr txBox="1"/>
+          <p:nvPr/>
+        </p:nvSpPr>
+        <p:spPr>
+          <a:xfrm>
+            <a:off x="6622542" y="1673352"/>
+            <a:ext cx="1616201" cy="438912"/>
+          </a:xfrm>
+          <a:prstGeom prst="rect">
+            <a:avLst/>
+          </a:prstGeom>
+          <a:noFill/>
+        </p:spPr>
+        <p:txBody>
+          <a:bodyPr wrap="square" lIns="0" rIns="0" tIns="0" bIns="0" anchor="t">
+            <a:spAutoFit/>
+          </a:bodyPr>
+          <a:lstStyle/>
+          <a:p>
+            <a:pPr algn="l"/>
+            <a:r>
+              <a:rPr sz="2600" b="1">
+                <a:solidFill>
+                  <a:srgbClr val="1C153E"/>
+                </a:solidFill>
+                <a:latin typeface="Calibri"/>
+              </a:rPr>
+              <a:t>38 signals</a:t>
+            </a:r>
+          </a:p>
+        </p:txBody>
+      </p:sp>
+      <p:sp>
+        <p:nvSpPr>
+          <p:cNvPr id="20" name="TextBox 19"/>
+          <p:cNvSpPr txBox="1"/>
+          <p:nvPr/>
+        </p:nvSpPr>
+        <p:spPr>
+          <a:xfrm>
+            <a:off x="6622542" y="2121408"/>
+            <a:ext cx="1616201" cy="329184"/>
+          </a:xfrm>
+          <a:prstGeom prst="rect">
+            <a:avLst/>
+          </a:prstGeom>
+          <a:noFill/>
+        </p:spPr>
+        <p:txBody>
+          <a:bodyPr wrap="square" lIns="0" rIns="0" tIns="0" bIns="0" anchor="t">
+            <a:spAutoFit/>
+          </a:bodyPr>
+          <a:lstStyle/>
+          <a:p>
+            <a:pPr algn="l"/>
+            <a:r>
+              <a:rPr sz="950" b="0">
+                <a:solidFill>
+                  <a:srgbClr val="5D5A72"/>
+                </a:solidFill>
+                <a:latin typeface="Calibri"/>
+              </a:rPr>
+              <a:t>surfaced across 13 live accounts</a:t>
+            </a:r>
+          </a:p>
+        </p:txBody>
+      </p:sp>
+      <p:sp>
+        <p:nvSpPr>
+          <p:cNvPr id="21" name="Rectangle 20"/>
+          <p:cNvSpPr/>
+          <p:nvPr/>
+        </p:nvSpPr>
+        <p:spPr>
+          <a:xfrm>
+            <a:off x="411480" y="2743200"/>
+            <a:ext cx="7955279" cy="566928"/>
+          </a:xfrm>
+          <a:prstGeom prst="rect">
+            <a:avLst/>
+          </a:prstGeom>
+          <a:solidFill>
+            <a:srgbClr val="F7F5FF"/>
+          </a:solidFill>
+          <a:ln>
+            <a:noFill/>
+          </a:ln>
+          <a:effectLst/>
+        </p:spPr>
+        <p:style>
+          <a:lnRef idx="1">
+            <a:schemeClr val="accent1"/>
+          </a:lnRef>
+          <a:fillRef idx="3">
+            <a:schemeClr val="accent1"/>
+          </a:fillRef>
+          <a:effectRef idx="2">
+            <a:schemeClr val="accent1"/>
+          </a:effectRef>
+          <a:fontRef idx="minor">
+            <a:schemeClr val="lt1"/>
+          </a:fontRef>
+        </p:style>
+        <p:txBody>
+          <a:bodyPr rtlCol="0" anchor="ctr"/>
+          <a:lstStyle/>
+          <a:p>
+            <a:pPr algn="ctr"/>
+          </a:p>
+        </p:txBody>
+      </p:sp>
+      <p:sp>
+        <p:nvSpPr>
+          <p:cNvPr id="22" name="Rectangle 21"/>
+          <p:cNvSpPr/>
+          <p:nvPr/>
+        </p:nvSpPr>
+        <p:spPr>
+          <a:xfrm>
+            <a:off x="411480" y="2743200"/>
+            <a:ext cx="82296" cy="566928"/>
+          </a:xfrm>
+          <a:prstGeom prst="rect">
+            <a:avLst/>
+          </a:prstGeom>
+          <a:solidFill>
+            <a:srgbClr val="5422FF"/>
+          </a:solidFill>
+          <a:ln>
+            <a:noFill/>
+          </a:ln>
+          <a:effectLst/>
+        </p:spPr>
+        <p:style>
+          <a:lnRef idx="1">
+            <a:schemeClr val="accent1"/>
+          </a:lnRef>
+          <a:fillRef idx="3">
+            <a:schemeClr val="accent1"/>
+          </a:fillRef>
+          <a:effectRef idx="2">
+            <a:schemeClr val="accent1"/>
+          </a:effectRef>
+          <a:fontRef idx="minor">
+            <a:schemeClr val="lt1"/>
+          </a:fontRef>
+        </p:style>
+        <p:txBody>
+          <a:bodyPr rtlCol="0" anchor="ctr"/>
+          <a:lstStyle/>
+          <a:p>
+            <a:pPr algn="ctr"/>
+          </a:p>
+        </p:txBody>
+      </p:sp>
+      <p:sp>
+        <p:nvSpPr>
+          <p:cNvPr id="23" name="TextBox 22"/>
+          <p:cNvSpPr txBox="1"/>
+          <p:nvPr/>
+        </p:nvSpPr>
+        <p:spPr>
+          <a:xfrm>
+            <a:off x="649224" y="2834640"/>
+            <a:ext cx="2057400" cy="484632"/>
+          </a:xfrm>
+          <a:prstGeom prst="rect">
+            <a:avLst/>
+          </a:prstGeom>
+          <a:noFill/>
+        </p:spPr>
+        <p:txBody>
+          <a:bodyPr wrap="square" lIns="0" rIns="0" tIns="0" bIns="0" anchor="ctr">
+            <a:spAutoFit/>
+          </a:bodyPr>
+          <a:lstStyle/>
+          <a:p>
+            <a:pPr algn="l"/>
+            <a:r>
+              <a:rPr sz="1300" b="1">
+                <a:solidFill>
+                  <a:srgbClr val="1C153E"/>
+                </a:solidFill>
+                <a:latin typeface="Calibri"/>
+              </a:rPr>
+              <a:t>Specific</a:t>
+            </a:r>
+          </a:p>
+        </p:txBody>
+      </p:sp>
+      <p:sp>
+        <p:nvSpPr>
+          <p:cNvPr id="24" name="TextBox 23"/>
+          <p:cNvSpPr txBox="1"/>
+          <p:nvPr/>
+        </p:nvSpPr>
+        <p:spPr>
+          <a:xfrm>
+            <a:off x="2816352" y="2834640"/>
+            <a:ext cx="5422392" cy="484632"/>
+          </a:xfrm>
+          <a:prstGeom prst="rect">
+            <a:avLst/>
+          </a:prstGeom>
+          <a:noFill/>
+        </p:spPr>
+        <p:txBody>
+          <a:bodyPr wrap="square" lIns="0" rIns="0" tIns="0" bIns="0" anchor="ctr">
+            <a:spAutoFit/>
+          </a:bodyPr>
+          <a:lstStyle/>
+          <a:p>
+            <a:pPr algn="l"/>
+            <a:r>
+              <a:rPr sz="1150" b="0">
+                <a:solidFill>
+                  <a:srgbClr val="5D5A72"/>
+                </a:solidFill>
+                <a:latin typeface="Calibri"/>
+              </a:rPr>
+              <a:t>One board replaces checking score, usage, supplier risk and news account by account.</a:t>
+            </a:r>
+          </a:p>
+        </p:txBody>
+      </p:sp>
+      <p:sp>
+        <p:nvSpPr>
+          <p:cNvPr id="25" name="Rectangle 24"/>
+          <p:cNvSpPr/>
+          <p:nvPr/>
+        </p:nvSpPr>
+        <p:spPr>
+          <a:xfrm>
+            <a:off x="411480" y="3401568"/>
+            <a:ext cx="7955279" cy="566928"/>
+          </a:xfrm>
+          <a:prstGeom prst="rect">
+            <a:avLst/>
+          </a:prstGeom>
+          <a:solidFill>
+            <a:srgbClr val="F7F5FF"/>
+          </a:solidFill>
+          <a:ln>
+            <a:noFill/>
+          </a:ln>
+          <a:effectLst/>
+        </p:spPr>
+        <p:style>
+          <a:lnRef idx="1">
+            <a:schemeClr val="accent1"/>
+          </a:lnRef>
+          <a:fillRef idx="3">
+            <a:schemeClr val="accent1"/>
+          </a:fillRef>
+          <a:effectRef idx="2">
+            <a:schemeClr val="accent1"/>
+          </a:effectRef>
+          <a:fontRef idx="minor">
+            <a:schemeClr val="lt1"/>
+          </a:fontRef>
+        </p:style>
+        <p:txBody>
+          <a:bodyPr rtlCol="0" anchor="ctr"/>
+          <a:lstStyle/>
+          <a:p>
+            <a:pPr algn="ctr"/>
+          </a:p>
+        </p:txBody>
+      </p:sp>
+      <p:sp>
+        <p:nvSpPr>
+          <p:cNvPr id="26" name="Rectangle 25"/>
+          <p:cNvSpPr/>
+          <p:nvPr/>
+        </p:nvSpPr>
+        <p:spPr>
+          <a:xfrm>
+            <a:off x="411480" y="3401568"/>
+            <a:ext cx="82296" cy="566928"/>
+          </a:xfrm>
+          <a:prstGeom prst="rect">
+            <a:avLst/>
+          </a:prstGeom>
+          <a:solidFill>
+            <a:srgbClr val="158A5E"/>
+          </a:solidFill>
+          <a:ln>
+            <a:noFill/>
+          </a:ln>
+          <a:effectLst/>
+        </p:spPr>
+        <p:style>
+          <a:lnRef idx="1">
+            <a:schemeClr val="accent1"/>
+          </a:lnRef>
+          <a:fillRef idx="3">
+            <a:schemeClr val="accent1"/>
+          </a:fillRef>
+          <a:effectRef idx="2">
+            <a:schemeClr val="accent1"/>
+          </a:effectRef>
+          <a:fontRef idx="minor">
+            <a:schemeClr val="lt1"/>
+          </a:fontRef>
+        </p:style>
+        <p:txBody>
+          <a:bodyPr rtlCol="0" anchor="ctr"/>
+          <a:lstStyle/>
+          <a:p>
+            <a:pPr algn="ctr"/>
+          </a:p>
+        </p:txBody>
+      </p:sp>
+      <p:sp>
+        <p:nvSpPr>
+          <p:cNvPr id="27" name="TextBox 26"/>
+          <p:cNvSpPr txBox="1"/>
+          <p:nvPr/>
+        </p:nvSpPr>
+        <p:spPr>
+          <a:xfrm>
+            <a:off x="649224" y="3493008"/>
+            <a:ext cx="2057400" cy="484632"/>
+          </a:xfrm>
+          <a:prstGeom prst="rect">
+            <a:avLst/>
+          </a:prstGeom>
+          <a:noFill/>
+        </p:spPr>
+        <p:txBody>
+          <a:bodyPr wrap="square" lIns="0" rIns="0" tIns="0" bIns="0" anchor="ctr">
+            <a:spAutoFit/>
+          </a:bodyPr>
+          <a:lstStyle/>
+          <a:p>
+            <a:pPr algn="l"/>
+            <a:r>
+              <a:rPr sz="1300" b="1">
+                <a:solidFill>
+                  <a:srgbClr val="1C153E"/>
+                </a:solidFill>
+                <a:latin typeface="Calibri"/>
+              </a:rPr>
+              <a:t>Measurable</a:t>
+            </a:r>
+          </a:p>
+        </p:txBody>
+      </p:sp>
+      <p:sp>
+        <p:nvSpPr>
+          <p:cNvPr id="28" name="TextBox 27"/>
+          <p:cNvSpPr txBox="1"/>
+          <p:nvPr/>
+        </p:nvSpPr>
+        <p:spPr>
+          <a:xfrm>
+            <a:off x="2816352" y="3493008"/>
+            <a:ext cx="5422392" cy="484632"/>
+          </a:xfrm>
+          <a:prstGeom prst="rect">
+            <a:avLst/>
+          </a:prstGeom>
+          <a:noFill/>
+        </p:spPr>
+        <p:txBody>
+          <a:bodyPr wrap="square" lIns="0" rIns="0" tIns="0" bIns="0" anchor="ctr">
+            <a:spAutoFit/>
+          </a:bodyPr>
+          <a:lstStyle/>
+          <a:p>
+            <a:pPr algn="l"/>
+            <a:r>
+              <a:rPr sz="1150" b="0">
+                <a:solidFill>
+                  <a:srgbClr val="5D5A72"/>
+                </a:solidFill>
+                <a:latin typeface="Calibri"/>
+              </a:rPr>
+              <a:t>13 accounts × 38 signals today; the daily research pass completes in under 5 minutes unattended.</a:t>
+            </a:r>
+          </a:p>
+        </p:txBody>
+      </p:sp>
+      <p:sp>
+        <p:nvSpPr>
+          <p:cNvPr id="29" name="Rectangle 28"/>
+          <p:cNvSpPr/>
+          <p:nvPr/>
+        </p:nvSpPr>
+        <p:spPr>
+          <a:xfrm>
+            <a:off x="411480" y="4059935"/>
+            <a:ext cx="7955279" cy="566928"/>
+          </a:xfrm>
+          <a:prstGeom prst="rect">
+            <a:avLst/>
+          </a:prstGeom>
+          <a:solidFill>
+            <a:srgbClr val="F7F5FF"/>
+          </a:solidFill>
+          <a:ln>
+            <a:noFill/>
+          </a:ln>
+          <a:effectLst/>
+        </p:spPr>
+        <p:style>
+          <a:lnRef idx="1">
+            <a:schemeClr val="accent1"/>
+          </a:lnRef>
+          <a:fillRef idx="3">
+            <a:schemeClr val="accent1"/>
+          </a:fillRef>
+          <a:effectRef idx="2">
+            <a:schemeClr val="accent1"/>
+          </a:effectRef>
+          <a:fontRef idx="minor">
+            <a:schemeClr val="lt1"/>
+          </a:fontRef>
+        </p:style>
+        <p:txBody>
+          <a:bodyPr rtlCol="0" anchor="ctr"/>
+          <a:lstStyle/>
+          <a:p>
+            <a:pPr algn="ctr"/>
+          </a:p>
+        </p:txBody>
+      </p:sp>
+      <p:sp>
+        <p:nvSpPr>
+          <p:cNvPr id="30" name="Rectangle 29"/>
+          <p:cNvSpPr/>
+          <p:nvPr/>
+        </p:nvSpPr>
+        <p:spPr>
+          <a:xfrm>
+            <a:off x="411480" y="4059935"/>
+            <a:ext cx="82296" cy="566928"/>
+          </a:xfrm>
+          <a:prstGeom prst="rect">
+            <a:avLst/>
+          </a:prstGeom>
+          <a:solidFill>
+            <a:srgbClr val="D98E2B"/>
+          </a:solidFill>
+          <a:ln>
+            <a:noFill/>
+          </a:ln>
+          <a:effectLst/>
+        </p:spPr>
+        <p:style>
+          <a:lnRef idx="1">
+            <a:schemeClr val="accent1"/>
+          </a:lnRef>
+          <a:fillRef idx="3">
+            <a:schemeClr val="accent1"/>
+          </a:fillRef>
+          <a:effectRef idx="2">
+            <a:schemeClr val="accent1"/>
+          </a:effectRef>
+          <a:fontRef idx="minor">
+            <a:schemeClr val="lt1"/>
+          </a:fontRef>
+        </p:style>
+        <p:txBody>
+          <a:bodyPr rtlCol="0" anchor="ctr"/>
+          <a:lstStyle/>
+          <a:p>
+            <a:pPr algn="ctr"/>
+          </a:p>
+        </p:txBody>
+      </p:sp>
+      <p:sp>
+        <p:nvSpPr>
+          <p:cNvPr id="31" name="TextBox 30"/>
+          <p:cNvSpPr txBox="1"/>
+          <p:nvPr/>
+        </p:nvSpPr>
+        <p:spPr>
+          <a:xfrm>
+            <a:off x="649224" y="4151375"/>
+            <a:ext cx="2057400" cy="484632"/>
+          </a:xfrm>
+          <a:prstGeom prst="rect">
+            <a:avLst/>
+          </a:prstGeom>
+          <a:noFill/>
+        </p:spPr>
+        <p:txBody>
+          <a:bodyPr wrap="square" lIns="0" rIns="0" tIns="0" bIns="0" anchor="ctr">
+            <a:spAutoFit/>
+          </a:bodyPr>
+          <a:lstStyle/>
+          <a:p>
+            <a:pPr algn="l"/>
+            <a:r>
+              <a:rPr sz="1300" b="1">
+                <a:solidFill>
+                  <a:srgbClr val="1C153E"/>
+                </a:solidFill>
+                <a:latin typeface="Calibri"/>
+              </a:rPr>
+              <a:t>Quality of life</a:t>
+            </a:r>
+          </a:p>
+        </p:txBody>
+      </p:sp>
+      <p:sp>
+        <p:nvSpPr>
+          <p:cNvPr id="32" name="TextBox 31"/>
+          <p:cNvSpPr txBox="1"/>
+          <p:nvPr/>
+        </p:nvSpPr>
+        <p:spPr>
+          <a:xfrm>
+            <a:off x="2816352" y="4151375"/>
+            <a:ext cx="5422392" cy="484632"/>
+          </a:xfrm>
+          <a:prstGeom prst="rect">
+            <a:avLst/>
+          </a:prstGeom>
+          <a:noFill/>
+        </p:spPr>
+        <p:txBody>
+          <a:bodyPr wrap="square" lIns="0" rIns="0" tIns="0" bIns="0" anchor="ctr">
+            <a:spAutoFit/>
+          </a:bodyPr>
+          <a:lstStyle/>
+          <a:p>
+            <a:pPr algn="l"/>
+            <a:r>
+              <a:rPr sz="1150" b="0">
+                <a:solidFill>
+                  <a:srgbClr val="5D5A72"/>
+                </a:solidFill>
+                <a:latin typeface="Calibri"/>
+              </a:rPr>
+              <a:t>The unglamorous part — hunting for a reason to make contact — is the part that disappears.</a:t>
+            </a:r>
+          </a:p>
+        </p:txBody>
+      </p:sp>
+      <p:sp>
+        <p:nvSpPr>
+          <p:cNvPr id="33" name="TextBox 32"/>
+          <p:cNvSpPr txBox="1"/>
+          <p:nvPr/>
+        </p:nvSpPr>
+        <p:spPr>
+          <a:xfrm>
+            <a:off x="411480" y="4645152"/>
+            <a:ext cx="7955279" cy="201168"/>
+          </a:xfrm>
+          <a:prstGeom prst="rect">
+            <a:avLst/>
+          </a:prstGeom>
+          <a:noFill/>
+        </p:spPr>
+        <p:txBody>
+          <a:bodyPr wrap="square" lIns="0" rIns="0" tIns="0" bIns="0" anchor="t">
+            <a:spAutoFit/>
+          </a:bodyPr>
+          <a:lstStyle/>
+          <a:p>
+            <a:pPr algn="l"/>
+            <a:r>
+              <a:rPr sz="850" b="0">
+                <a:solidFill>
+                  <a:srgbClr val="5D5A72"/>
+                </a:solidFill>
+                <a:latin typeface="Calibri"/>
+              </a:rPr>
+              <a:t>Time figures are a stated model: 15 min manual review vs 2 min to action a pre-drafted card, across 13 accounts, reviewed weekly.</a:t>
+            </a:r>
+          </a:p>
+        </p:txBody>
+      </p:sp>
+    </p:spTree>
+  </p:cSld>
+  <p:clrMapOvr>
+    <a:masterClrMapping/>
+  </p:clrMapOvr>
+</p:sld>
+</file>
+
+<file path=ppt/slides/slide9.xml><?xml version="1.0" encoding="utf-8"?>
+<p:sld xmlns:a="http://schemas.openxmlformats.org/drawingml/2006/main" xmlns:p="http://schemas.openxmlformats.org/presentationml/2006/main" xmlns:r="http://schemas.openxmlformats.org/officeDocument/2006/relationships">
+  <p:cSld>
+    <p:spTree>
+      <p:nvGrpSpPr>
+        <p:cNvPr id="1" name=""/>
+        <p:cNvGrpSpPr/>
+        <p:nvPr/>
+      </p:nvGrpSpPr>
+      <p:grpSpPr/>
+      <p:sp>
+        <p:nvSpPr>
+          <p:cNvPr id="2" name="Rectangle 1"/>
+          <p:cNvSpPr/>
+          <p:nvPr/>
+        </p:nvSpPr>
+        <p:spPr>
+          <a:xfrm>
+            <a:off x="0" y="0"/>
+            <a:ext cx="9144000" cy="5138928"/>
+          </a:xfrm>
+          <a:prstGeom prst="rect">
+            <a:avLst/>
+          </a:prstGeom>
+          <a:solidFill>
+            <a:srgbClr val="FFFFFF"/>
+          </a:solidFill>
+          <a:ln>
+            <a:noFill/>
+          </a:ln>
+          <a:effectLst/>
+        </p:spPr>
+        <p:style>
+          <a:lnRef idx="1">
+            <a:schemeClr val="accent1"/>
+          </a:lnRef>
+          <a:fillRef idx="3">
+            <a:schemeClr val="accent1"/>
+          </a:fillRef>
+          <a:effectRef idx="2">
+            <a:schemeClr val="accent1"/>
+          </a:effectRef>
+          <a:fontRef idx="minor">
+            <a:schemeClr val="lt1"/>
+          </a:fontRef>
+        </p:style>
+        <p:txBody>
+          <a:bodyPr rtlCol="0" anchor="ctr"/>
+          <a:lstStyle/>
+          <a:p>
+            <a:pPr algn="ctr"/>
+          </a:p>
+        </p:txBody>
+      </p:sp>
+      <p:sp>
+        <p:nvSpPr>
+          <p:cNvPr id="3" name="Rectangle 2"/>
+          <p:cNvSpPr/>
+          <p:nvPr/>
+        </p:nvSpPr>
+        <p:spPr>
+          <a:xfrm>
+            <a:off x="411480" y="374904"/>
+            <a:ext cx="64008" cy="219456"/>
+          </a:xfrm>
+          <a:prstGeom prst="rect">
+            <a:avLst/>
+          </a:prstGeom>
+          <a:solidFill>
+            <a:srgbClr val="5422FF"/>
+          </a:solidFill>
+          <a:ln>
+            <a:noFill/>
+          </a:ln>
+          <a:effectLst/>
+        </p:spPr>
+        <p:style>
+          <a:lnRef idx="1">
+            <a:schemeClr val="accent1"/>
+          </a:lnRef>
+          <a:fillRef idx="3">
+            <a:schemeClr val="accent1"/>
+          </a:fillRef>
+          <a:effectRef idx="2">
+            <a:schemeClr val="accent1"/>
+          </a:effectRef>
+          <a:fontRef idx="minor">
+            <a:schemeClr val="lt1"/>
+          </a:fontRef>
+        </p:style>
+        <p:txBody>
+          <a:bodyPr rtlCol="0" anchor="ctr"/>
+          <a:lstStyle/>
+          <a:p>
+            <a:pPr algn="ctr"/>
+          </a:p>
+        </p:txBody>
+      </p:sp>
+      <p:sp>
+        <p:nvSpPr>
+          <p:cNvPr id="4" name="TextBox 3"/>
+          <p:cNvSpPr txBox="1"/>
+          <p:nvPr/>
+        </p:nvSpPr>
+        <p:spPr>
+          <a:xfrm>
+            <a:off x="566928" y="329184"/>
+            <a:ext cx="4114800" cy="274320"/>
+          </a:xfrm>
+          <a:prstGeom prst="rect">
+            <a:avLst/>
+          </a:prstGeom>
+          <a:noFill/>
+        </p:spPr>
+        <p:txBody>
+          <a:bodyPr wrap="square" lIns="0" rIns="0" tIns="0" bIns="0" anchor="t">
+            <a:spAutoFit/>
+          </a:bodyPr>
+          <a:lstStyle/>
+          <a:p>
+            <a:pPr algn="l"/>
+            <a:r>
+              <a:rPr sz="1250" b="1">
+                <a:solidFill>
+                  <a:srgbClr val="5422FF"/>
+                </a:solidFill>
+                <a:latin typeface="Calibri"/>
+              </a:rPr>
+              <a:t>CRITERION 3 — BUSINESS POTENTIAL</a:t>
+            </a:r>
+          </a:p>
+        </p:txBody>
+      </p:sp>
+      <p:sp>
+        <p:nvSpPr>
+          <p:cNvPr id="5" name="TextBox 4"/>
+          <p:cNvSpPr txBox="1"/>
+          <p:nvPr/>
+        </p:nvSpPr>
+        <p:spPr>
+          <a:xfrm>
+            <a:off x="411480" y="621792"/>
+            <a:ext cx="7891272" cy="484632"/>
+          </a:xfrm>
+          <a:prstGeom prst="rect">
+            <a:avLst/>
+          </a:prstGeom>
+          <a:noFill/>
+        </p:spPr>
+        <p:txBody>
+          <a:bodyPr wrap="square" lIns="0" rIns="0" tIns="0" bIns="0" anchor="t">
+            <a:spAutoFit/>
+          </a:bodyPr>
+          <a:lstStyle/>
+          <a:p>
+            <a:pPr algn="l"/>
+            <a:r>
+              <a:rPr sz="2900" b="1">
+                <a:solidFill>
+                  <a:srgbClr val="1C153E"/>
+                </a:solidFill>
+                <a:latin typeface="Calibri"/>
+              </a:rPr>
+              <a:t>Four ways this grows SecurityScorecard ARR</a:t>
+            </a:r>
+          </a:p>
+        </p:txBody>
+      </p:sp>
+      <p:sp>
+        <p:nvSpPr>
+          <p:cNvPr id="6" name="TextBox 5"/>
+          <p:cNvSpPr txBox="1"/>
+          <p:nvPr/>
+        </p:nvSpPr>
+        <p:spPr>
+          <a:xfrm>
+            <a:off x="411480" y="1060704"/>
+            <a:ext cx="7818120" cy="347472"/>
+          </a:xfrm>
+          <a:prstGeom prst="rect">
+            <a:avLst/>
+          </a:prstGeom>
+          <a:noFill/>
+        </p:spPr>
+        <p:txBody>
+          <a:bodyPr wrap="square" lIns="0" rIns="0" tIns="0" bIns="0" anchor="t">
+            <a:spAutoFit/>
+          </a:bodyPr>
+          <a:lstStyle/>
+          <a:p>
+            <a:pPr algn="l"/>
+            <a:r>
+              <a:rPr sz="1400" b="0">
+                <a:solidFill>
+                  <a:srgbClr val="5D5A72"/>
+                </a:solidFill>
+                <a:latin typeface="Calibri"/>
+              </a:rPr>
+              <a:t>For the customer, earlier warning. For the company, more upsell conversations, better timed.</a:t>
+            </a:r>
+          </a:p>
+        </p:txBody>
+      </p:sp>
+      <p:sp>
+        <p:nvSpPr>
+          <p:cNvPr id="7" name="TextBox 6"/>
+          <p:cNvSpPr txBox="1"/>
+          <p:nvPr/>
+        </p:nvSpPr>
+        <p:spPr>
+          <a:xfrm>
+            <a:off x="411480" y="4855464"/>
+            <a:ext cx="4114800" cy="210312"/>
+          </a:xfrm>
+          <a:prstGeom prst="rect">
+            <a:avLst/>
+          </a:prstGeom>
+          <a:noFill/>
+        </p:spPr>
+        <p:txBody>
+          <a:bodyPr wrap="square" lIns="0" rIns="0" tIns="0" bIns="0" anchor="t">
+            <a:spAutoFit/>
+          </a:bodyPr>
+          <a:lstStyle/>
+          <a:p>
+            <a:pPr algn="l"/>
+            <a:r>
+              <a:rPr sz="1000" b="0">
+                <a:solidFill>
+                  <a:srgbClr val="5D5A72"/>
+                </a:solidFill>
+                <a:latin typeface="Calibri"/>
+              </a:rPr>
+              <a:t>Gaia ARR Growth Agent</a:t>
+            </a:r>
+          </a:p>
+        </p:txBody>
+      </p:sp>
+      <p:sp>
+        <p:nvSpPr>
+          <p:cNvPr id="8" name="TextBox 7"/>
+          <p:cNvSpPr txBox="1"/>
+          <p:nvPr/>
+        </p:nvSpPr>
+        <p:spPr>
+          <a:xfrm>
+            <a:off x="8229600" y="4855464"/>
+            <a:ext cx="484632" cy="210312"/>
+          </a:xfrm>
+          <a:prstGeom prst="rect">
+            <a:avLst/>
+          </a:prstGeom>
+          <a:noFill/>
+        </p:spPr>
+        <p:txBody>
+          <a:bodyPr wrap="square" lIns="0" rIns="0" tIns="0" bIns="0" anchor="t">
+            <a:spAutoFit/>
+          </a:bodyPr>
+          <a:lstStyle/>
+          <a:p>
+            <a:pPr algn="l"/>
+            <a:r>
+              <a:rPr sz="1000" b="0">
+                <a:solidFill>
+                  <a:srgbClr val="5D5A72"/>
+                </a:solidFill>
+                <a:latin typeface="Calibri"/>
+              </a:rPr>
+              <a:t>9</a:t>
+            </a:r>
+          </a:p>
+        </p:txBody>
+      </p:sp>
+      <p:sp>
+        <p:nvSpPr>
+          <p:cNvPr id="9" name="Rectangle 8"/>
+          <p:cNvSpPr/>
+          <p:nvPr/>
+        </p:nvSpPr>
+        <p:spPr>
+          <a:xfrm>
+            <a:off x="411480" y="1572768"/>
+            <a:ext cx="1911095" cy="2103120"/>
+          </a:xfrm>
+          <a:prstGeom prst="rect">
+            <a:avLst/>
+          </a:prstGeom>
+          <a:solidFill>
+            <a:srgbClr val="F7F5FF"/>
+          </a:solidFill>
+          <a:ln>
+            <a:noFill/>
+          </a:ln>
+          <a:effectLst/>
+        </p:spPr>
+        <p:style>
+          <a:lnRef idx="1">
+            <a:schemeClr val="accent1"/>
+          </a:lnRef>
+          <a:fillRef idx="3">
+            <a:schemeClr val="accent1"/>
+          </a:fillRef>
+          <a:effectRef idx="2">
+            <a:schemeClr val="accent1"/>
+          </a:effectRef>
+          <a:fontRef idx="minor">
+            <a:schemeClr val="lt1"/>
+          </a:fontRef>
+        </p:style>
+        <p:txBody>
+          <a:bodyPr rtlCol="0" anchor="ctr"/>
+          <a:lstStyle/>
+          <a:p>
+            <a:pPr algn="ctr"/>
+          </a:p>
+        </p:txBody>
+      </p:sp>
+      <p:sp>
+        <p:nvSpPr>
+          <p:cNvPr id="10" name="Rectangle 9"/>
+          <p:cNvSpPr/>
+          <p:nvPr/>
+        </p:nvSpPr>
+        <p:spPr>
+          <a:xfrm>
+            <a:off x="411480" y="1572768"/>
+            <a:ext cx="1911095" cy="54864"/>
+          </a:xfrm>
+          <a:prstGeom prst="rect">
+            <a:avLst/>
+          </a:prstGeom>
+          <a:solidFill>
+            <a:srgbClr val="5422FF"/>
+          </a:solidFill>
+          <a:ln>
+            <a:noFill/>
+          </a:ln>
+          <a:effectLst/>
+        </p:spPr>
+        <p:style>
+          <a:lnRef idx="1">
+            <a:schemeClr val="accent1"/>
+          </a:lnRef>
+          <a:fillRef idx="3">
+            <a:schemeClr val="accent1"/>
+          </a:fillRef>
+          <a:effectRef idx="2">
+            <a:schemeClr val="accent1"/>
+          </a:effectRef>
+          <a:fontRef idx="minor">
+            <a:schemeClr val="lt1"/>
+          </a:fontRef>
+        </p:style>
+        <p:txBody>
+          <a:bodyPr rtlCol="0" anchor="ctr"/>
+          <a:lstStyle/>
+          <a:p>
+            <a:pPr algn="ctr"/>
+          </a:p>
+        </p:txBody>
+      </p:sp>
+      <p:sp>
+        <p:nvSpPr>
+          <p:cNvPr id="11" name="TextBox 10"/>
+          <p:cNvSpPr txBox="1"/>
+          <p:nvPr/>
+        </p:nvSpPr>
+        <p:spPr>
+          <a:xfrm>
+            <a:off x="566928" y="1783080"/>
+            <a:ext cx="1609344" cy="484632"/>
+          </a:xfrm>
+          <a:prstGeom prst="rect">
+            <a:avLst/>
+          </a:prstGeom>
+          <a:noFill/>
+        </p:spPr>
+        <p:txBody>
+          <a:bodyPr wrap="square" lIns="0" rIns="0" tIns="0" bIns="0" anchor="t">
+            <a:spAutoFit/>
+          </a:bodyPr>
+          <a:lstStyle/>
+          <a:p>
+            <a:pPr algn="l"/>
+            <a:r>
+              <a:rPr sz="1300" b="1">
+                <a:solidFill>
+                  <a:srgbClr val="1C153E"/>
+                </a:solidFill>
+                <a:latin typeface="Calibri"/>
+              </a:rPr>
+              <a:t>More upsell conversations</a:t>
+            </a:r>
+          </a:p>
+        </p:txBody>
+      </p:sp>
+      <p:sp>
+        <p:nvSpPr>
+          <p:cNvPr id="12" name="TextBox 11"/>
+          <p:cNvSpPr txBox="1"/>
+          <p:nvPr/>
+        </p:nvSpPr>
+        <p:spPr>
+          <a:xfrm>
+            <a:off x="566928" y="2231136"/>
+            <a:ext cx="1609344" cy="1280160"/>
+          </a:xfrm>
+          <a:prstGeom prst="rect">
+            <a:avLst/>
+          </a:prstGeom>
+          <a:noFill/>
+        </p:spPr>
+        <p:txBody>
+          <a:bodyPr wrap="square" lIns="0" rIns="0" tIns="0" bIns="0" anchor="t">
+            <a:spAutoFit/>
+          </a:bodyPr>
+          <a:lstStyle/>
+          <a:p>
+            <a:pPr algn="l"/>
+            <a:r>
+              <a:rPr sz="1050" b="0">
+                <a:solidFill>
+                  <a:srgbClr val="5D5A72"/>
+                </a:solidFill>
+                <a:latin typeface="Calibri"/>
+              </a:rPr>
+              <a:t>Every account gets reviewed every week instead of the loudest ones. Signals that used to expire unnoticed now reach the CSM who owns the account.</a:t>
+            </a:r>
+          </a:p>
+        </p:txBody>
+      </p:sp>
+      <p:sp>
+        <p:nvSpPr>
+          <p:cNvPr id="13" name="Rectangle 12"/>
+          <p:cNvSpPr/>
+          <p:nvPr/>
+        </p:nvSpPr>
+        <p:spPr>
+          <a:xfrm>
+            <a:off x="2514600" y="1572768"/>
+            <a:ext cx="1911095" cy="2103120"/>
+          </a:xfrm>
+          <a:prstGeom prst="rect">
+            <a:avLst/>
+          </a:prstGeom>
+          <a:solidFill>
+            <a:srgbClr val="F7F5FF"/>
+          </a:solidFill>
+          <a:ln>
+            <a:noFill/>
+          </a:ln>
+          <a:effectLst/>
+        </p:spPr>
+        <p:style>
+          <a:lnRef idx="1">
+            <a:schemeClr val="accent1"/>
+          </a:lnRef>
+          <a:fillRef idx="3">
+            <a:schemeClr val="accent1"/>
+          </a:fillRef>
+          <a:effectRef idx="2">
+            <a:schemeClr val="accent1"/>
+          </a:effectRef>
+          <a:fontRef idx="minor">
+            <a:schemeClr val="lt1"/>
+          </a:fontRef>
+        </p:style>
+        <p:txBody>
+          <a:bodyPr rtlCol="0" anchor="ctr"/>
+          <a:lstStyle/>
+          <a:p>
+            <a:pPr algn="ctr"/>
+          </a:p>
+        </p:txBody>
+      </p:sp>
+      <p:sp>
+        <p:nvSpPr>
+          <p:cNvPr id="14" name="Rectangle 13"/>
+          <p:cNvSpPr/>
+          <p:nvPr/>
+        </p:nvSpPr>
+        <p:spPr>
+          <a:xfrm>
+            <a:off x="2514600" y="1572768"/>
+            <a:ext cx="1911095" cy="54864"/>
+          </a:xfrm>
+          <a:prstGeom prst="rect">
+            <a:avLst/>
+          </a:prstGeom>
+          <a:solidFill>
+            <a:srgbClr val="158A5E"/>
+          </a:solidFill>
+          <a:ln>
+            <a:noFill/>
+          </a:ln>
+          <a:effectLst/>
+        </p:spPr>
+        <p:style>
+          <a:lnRef idx="1">
+            <a:schemeClr val="accent1"/>
+          </a:lnRef>
+          <a:fillRef idx="3">
+            <a:schemeClr val="accent1"/>
+          </a:fillRef>
+          <a:effectRef idx="2">
+            <a:schemeClr val="accent1"/>
+          </a:effectRef>
+          <a:fontRef idx="minor">
+            <a:schemeClr val="lt1"/>
+          </a:fontRef>
+        </p:style>
+        <p:txBody>
+          <a:bodyPr rtlCol="0" anchor="ctr"/>
+          <a:lstStyle/>
+          <a:p>
+            <a:pPr algn="ctr"/>
+          </a:p>
+        </p:txBody>
+      </p:sp>
+      <p:sp>
+        <p:nvSpPr>
+          <p:cNvPr id="15" name="TextBox 14"/>
+          <p:cNvSpPr txBox="1"/>
+          <p:nvPr/>
+        </p:nvSpPr>
+        <p:spPr>
+          <a:xfrm>
+            <a:off x="2670048" y="1783080"/>
+            <a:ext cx="1609344" cy="484632"/>
+          </a:xfrm>
+          <a:prstGeom prst="rect">
+            <a:avLst/>
+          </a:prstGeom>
+          <a:noFill/>
+        </p:spPr>
+        <p:txBody>
+          <a:bodyPr wrap="square" lIns="0" rIns="0" tIns="0" bIns="0" anchor="t">
+            <a:spAutoFit/>
+          </a:bodyPr>
+          <a:lstStyle/>
+          <a:p>
+            <a:pPr algn="l"/>
+            <a:r>
+              <a:rPr sz="1300" b="1">
+                <a:solidFill>
+                  <a:srgbClr val="1C153E"/>
+                </a:solidFill>
+                <a:latin typeface="Calibri"/>
+              </a:rPr>
+              <a:t>Better-timed outreach</a:t>
+            </a:r>
+          </a:p>
+        </p:txBody>
+      </p:sp>
+      <p:sp>
+        <p:nvSpPr>
+          <p:cNvPr id="16" name="TextBox 15"/>
+          <p:cNvSpPr txBox="1"/>
+          <p:nvPr/>
+        </p:nvSpPr>
+        <p:spPr>
+          <a:xfrm>
+            <a:off x="2670048" y="2231136"/>
+            <a:ext cx="1609344" cy="1280160"/>
+          </a:xfrm>
+          <a:prstGeom prst="rect">
+            <a:avLst/>
+          </a:prstGeom>
+          <a:noFill/>
+        </p:spPr>
+        <p:txBody>
+          <a:bodyPr wrap="square" lIns="0" rIns="0" tIns="0" bIns="0" anchor="t">
+            <a:spAutoFit/>
+          </a:bodyPr>
+          <a:lstStyle/>
+          <a:p>
+            <a:pPr algn="l"/>
+            <a:r>
+              <a:rPr sz="1050" b="0">
+                <a:solidFill>
+                  <a:srgbClr val="5D5A72"/>
+                </a:solidFill>
+                <a:latin typeface="Calibri"/>
+              </a:rPr>
+              <a:t>Contact lands while the acquisition or launch is still news, which is when expanding coverage is an easy yes rather than a cold ask.</a:t>
+            </a:r>
+          </a:p>
+        </p:txBody>
+      </p:sp>
+      <p:sp>
+        <p:nvSpPr>
+          <p:cNvPr id="17" name="Rectangle 16"/>
+          <p:cNvSpPr/>
+          <p:nvPr/>
+        </p:nvSpPr>
+        <p:spPr>
+          <a:xfrm>
+            <a:off x="4608576" y="1572768"/>
+            <a:ext cx="1911095" cy="2103120"/>
+          </a:xfrm>
+          <a:prstGeom prst="rect">
+            <a:avLst/>
+          </a:prstGeom>
+          <a:solidFill>
+            <a:srgbClr val="F7F5FF"/>
+          </a:solidFill>
+          <a:ln>
+            <a:noFill/>
+          </a:ln>
+          <a:effectLst/>
+        </p:spPr>
+        <p:style>
+          <a:lnRef idx="1">
+            <a:schemeClr val="accent1"/>
+          </a:lnRef>
+          <a:fillRef idx="3">
+            <a:schemeClr val="accent1"/>
+          </a:fillRef>
+          <a:effectRef idx="2">
+            <a:schemeClr val="accent1"/>
+          </a:effectRef>
+          <a:fontRef idx="minor">
+            <a:schemeClr val="lt1"/>
+          </a:fontRef>
+        </p:style>
+        <p:txBody>
+          <a:bodyPr rtlCol="0" anchor="ctr"/>
+          <a:lstStyle/>
+          <a:p>
+            <a:pPr algn="ctr"/>
+          </a:p>
+        </p:txBody>
+      </p:sp>
+      <p:sp>
+        <p:nvSpPr>
+          <p:cNvPr id="18" name="Rectangle 17"/>
+          <p:cNvSpPr/>
+          <p:nvPr/>
+        </p:nvSpPr>
+        <p:spPr>
+          <a:xfrm>
+            <a:off x="4608576" y="1572768"/>
+            <a:ext cx="1911095" cy="54864"/>
+          </a:xfrm>
+          <a:prstGeom prst="rect">
+            <a:avLst/>
+          </a:prstGeom>
+          <a:solidFill>
+            <a:srgbClr val="D98E2B"/>
+          </a:solidFill>
+          <a:ln>
+            <a:noFill/>
+          </a:ln>
+          <a:effectLst/>
+        </p:spPr>
+        <p:style>
+          <a:lnRef idx="1">
+            <a:schemeClr val="accent1"/>
+          </a:lnRef>
+          <a:fillRef idx="3">
+            <a:schemeClr val="accent1"/>
+          </a:fillRef>
+          <a:effectRef idx="2">
+            <a:schemeClr val="accent1"/>
+          </a:effectRef>
+          <a:fontRef idx="minor">
+            <a:schemeClr val="lt1"/>
+          </a:fontRef>
+        </p:style>
+        <p:txBody>
+          <a:bodyPr rtlCol="0" anchor="ctr"/>
+          <a:lstStyle/>
+          <a:p>
+            <a:pPr algn="ctr"/>
+          </a:p>
+        </p:txBody>
+      </p:sp>
+      <p:sp>
+        <p:nvSpPr>
+          <p:cNvPr id="19" name="TextBox 18"/>
+          <p:cNvSpPr txBox="1"/>
+          <p:nvPr/>
+        </p:nvSpPr>
+        <p:spPr>
+          <a:xfrm>
+            <a:off x="4764024" y="1783080"/>
+            <a:ext cx="1609344" cy="484632"/>
+          </a:xfrm>
+          <a:prstGeom prst="rect">
+            <a:avLst/>
+          </a:prstGeom>
+          <a:noFill/>
+        </p:spPr>
+        <p:txBody>
+          <a:bodyPr wrap="square" lIns="0" rIns="0" tIns="0" bIns="0" anchor="t">
+            <a:spAutoFit/>
+          </a:bodyPr>
+          <a:lstStyle/>
+          <a:p>
+            <a:pPr algn="l"/>
+            <a:r>
+              <a:rPr sz="1300" b="1">
+                <a:solidFill>
+                  <a:srgbClr val="1C153E"/>
+                </a:solidFill>
+                <a:latin typeface="Calibri"/>
+              </a:rPr>
+              <a:t>Retention through proof</a:t>
+            </a:r>
+          </a:p>
+        </p:txBody>
+      </p:sp>
+      <p:sp>
+        <p:nvSpPr>
+          <p:cNvPr id="20" name="TextBox 19"/>
+          <p:cNvSpPr txBox="1"/>
+          <p:nvPr/>
+        </p:nvSpPr>
+        <p:spPr>
+          <a:xfrm>
+            <a:off x="4764024" y="2231136"/>
+            <a:ext cx="1609344" cy="1280160"/>
+          </a:xfrm>
+          <a:prstGeom prst="rect">
+            <a:avLst/>
+          </a:prstGeom>
+          <a:noFill/>
+        </p:spPr>
+        <p:txBody>
+          <a:bodyPr wrap="square" lIns="0" rIns="0" tIns="0" bIns="0" anchor="t">
+            <a:spAutoFit/>
+          </a:bodyPr>
+          <a:lstStyle/>
+          <a:p>
+            <a:pPr algn="l"/>
+            <a:r>
+              <a:rPr sz="1050" b="0">
+                <a:solidFill>
+                  <a:srgbClr val="5D5A72"/>
+                </a:solidFill>
+                <a:latin typeface="Calibri"/>
+              </a:rPr>
+              <a:t>Score improvements and early supplier warnings become renewal evidence the customer can see, lowering churn risk at exactly the right moment.</a:t>
+            </a:r>
+          </a:p>
+        </p:txBody>
+      </p:sp>
+      <p:sp>
+        <p:nvSpPr>
+          <p:cNvPr id="21" name="Rectangle 20"/>
+          <p:cNvSpPr/>
+          <p:nvPr/>
+        </p:nvSpPr>
+        <p:spPr>
+          <a:xfrm>
+            <a:off x="6711696" y="1572768"/>
+            <a:ext cx="1911095" cy="2103120"/>
+          </a:xfrm>
+          <a:prstGeom prst="rect">
+            <a:avLst/>
+          </a:prstGeom>
+          <a:solidFill>
+            <a:srgbClr val="F7F5FF"/>
+          </a:solidFill>
+          <a:ln>
+            <a:noFill/>
+          </a:ln>
+          <a:effectLst/>
+        </p:spPr>
+        <p:style>
+          <a:lnRef idx="1">
+            <a:schemeClr val="accent1"/>
+          </a:lnRef>
+          <a:fillRef idx="3">
+            <a:schemeClr val="accent1"/>
+          </a:fillRef>
+          <a:effectRef idx="2">
+            <a:schemeClr val="accent1"/>
+          </a:effectRef>
+          <a:fontRef idx="minor">
+            <a:schemeClr val="lt1"/>
+          </a:fontRef>
+        </p:style>
+        <p:txBody>
+          <a:bodyPr rtlCol="0" anchor="ctr"/>
+          <a:lstStyle/>
+          <a:p>
+            <a:pPr algn="ctr"/>
+          </a:p>
+        </p:txBody>
+      </p:sp>
+      <p:sp>
+        <p:nvSpPr>
+          <p:cNvPr id="22" name="Rectangle 21"/>
+          <p:cNvSpPr/>
+          <p:nvPr/>
+        </p:nvSpPr>
+        <p:spPr>
+          <a:xfrm>
+            <a:off x="6711696" y="1572768"/>
+            <a:ext cx="1911095" cy="54864"/>
+          </a:xfrm>
+          <a:prstGeom prst="rect">
+            <a:avLst/>
+          </a:prstGeom>
+          <a:solidFill>
+            <a:srgbClr val="5D5A72"/>
+          </a:solidFill>
+          <a:ln>
+            <a:noFill/>
+          </a:ln>
+          <a:effectLst/>
+        </p:spPr>
+        <p:style>
+          <a:lnRef idx="1">
+            <a:schemeClr val="accent1"/>
+          </a:lnRef>
+          <a:fillRef idx="3">
+            <a:schemeClr val="accent1"/>
+          </a:fillRef>
+          <a:effectRef idx="2">
+            <a:schemeClr val="accent1"/>
+          </a:effectRef>
+          <a:fontRef idx="minor">
+            <a:schemeClr val="lt1"/>
+          </a:fontRef>
+        </p:style>
+        <p:txBody>
+          <a:bodyPr rtlCol="0" anchor="ctr"/>
+          <a:lstStyle/>
+          <a:p>
+            <a:pPr algn="ctr"/>
+          </a:p>
+        </p:txBody>
+      </p:sp>
+      <p:sp>
+        <p:nvSpPr>
+          <p:cNvPr id="23" name="TextBox 22"/>
+          <p:cNvSpPr txBox="1"/>
+          <p:nvPr/>
+        </p:nvSpPr>
+        <p:spPr>
+          <a:xfrm>
+            <a:off x="6867144" y="1783080"/>
+            <a:ext cx="1609344" cy="484632"/>
+          </a:xfrm>
+          <a:prstGeom prst="rect">
+            <a:avLst/>
+          </a:prstGeom>
+          <a:noFill/>
+        </p:spPr>
+        <p:txBody>
+          <a:bodyPr wrap="square" lIns="0" rIns="0" tIns="0" bIns="0" anchor="t">
+            <a:spAutoFit/>
+          </a:bodyPr>
+          <a:lstStyle/>
+          <a:p>
+            <a:pPr algn="l"/>
+            <a:r>
+              <a:rPr sz="1300" b="1">
+                <a:solidFill>
+                  <a:srgbClr val="1C153E"/>
+                </a:solidFill>
+                <a:latin typeface="Calibri"/>
+              </a:rPr>
+              <a:t>Capacity, not headcount</a:t>
+            </a:r>
+          </a:p>
+        </p:txBody>
+      </p:sp>
+      <p:sp>
+        <p:nvSpPr>
+          <p:cNvPr id="24" name="TextBox 23"/>
+          <p:cNvSpPr txBox="1"/>
+          <p:nvPr/>
+        </p:nvSpPr>
+        <p:spPr>
+          <a:xfrm>
+            <a:off x="6867144" y="2231136"/>
+            <a:ext cx="1609344" cy="1280160"/>
+          </a:xfrm>
+          <a:prstGeom prst="rect">
+            <a:avLst/>
+          </a:prstGeom>
+          <a:noFill/>
+        </p:spPr>
+        <p:txBody>
+          <a:bodyPr wrap="square" lIns="0" rIns="0" tIns="0" bIns="0" anchor="t">
+            <a:spAutoFit/>
+          </a:bodyPr>
+          <a:lstStyle/>
+          <a:p>
+            <a:pPr algn="l"/>
+            <a:r>
+              <a:rPr sz="1050" b="0">
+                <a:solidFill>
+                  <a:srgbClr val="5D5A72"/>
+                </a:solidFill>
+                <a:latin typeface="Calibri"/>
+              </a:rPr>
+              <a:t>A CSM covers more accounts at the same quality, so portfolio growth doesn't require proportional hiring.</a:t>
+            </a:r>
+          </a:p>
+        </p:txBody>
+      </p:sp>
+      <p:sp>
+        <p:nvSpPr>
+          <p:cNvPr id="25" name="Rectangle 24"/>
+          <p:cNvSpPr/>
+          <p:nvPr/>
+        </p:nvSpPr>
+        <p:spPr>
+          <a:xfrm>
+            <a:off x="411480" y="3840480"/>
+            <a:ext cx="7955279" cy="640080"/>
+          </a:xfrm>
+          <a:prstGeom prst="rect">
+            <a:avLst/>
+          </a:prstGeom>
+          <a:solidFill>
+            <a:srgbClr val="F7F5FF"/>
+          </a:solidFill>
+          <a:ln>
+            <a:noFill/>
+          </a:ln>
+          <a:effectLst/>
+        </p:spPr>
+        <p:style>
+          <a:lnRef idx="1">
+            <a:schemeClr val="accent1"/>
+          </a:lnRef>
+          <a:fillRef idx="3">
+            <a:schemeClr val="accent1"/>
+          </a:fillRef>
+          <a:effectRef idx="2">
+            <a:schemeClr val="accent1"/>
+          </a:effectRef>
+          <a:fontRef idx="minor">
+            <a:schemeClr val="lt1"/>
+          </a:fontRef>
+        </p:style>
+        <p:txBody>
+          <a:bodyPr rtlCol="0" anchor="ctr"/>
+          <a:lstStyle/>
+          <a:p>
+            <a:pPr algn="ctr"/>
+          </a:p>
+        </p:txBody>
+      </p:sp>
+      <p:sp>
+        <p:nvSpPr>
+          <p:cNvPr id="26" name="Rectangle 25"/>
+          <p:cNvSpPr/>
+          <p:nvPr/>
+        </p:nvSpPr>
+        <p:spPr>
+          <a:xfrm>
+            <a:off x="411480" y="3840480"/>
+            <a:ext cx="82296" cy="640080"/>
+          </a:xfrm>
+          <a:prstGeom prst="rect">
+            <a:avLst/>
+          </a:prstGeom>
+          <a:solidFill>
+            <a:srgbClr val="5422FF"/>
+          </a:solidFill>
+          <a:ln>
+            <a:noFill/>
+          </a:ln>
+          <a:effectLst/>
+        </p:spPr>
+        <p:style>
+          <a:lnRef idx="1">
+            <a:schemeClr val="accent1"/>
+          </a:lnRef>
+          <a:fillRef idx="3">
+            <a:schemeClr val="accent1"/>
+          </a:fillRef>
+          <a:effectRef idx="2">
+            <a:schemeClr val="accent1"/>
+          </a:effectRef>
+          <a:fontRef idx="minor">
+            <a:schemeClr val="lt1"/>
+          </a:fontRef>
+        </p:style>
+        <p:txBody>
+          <a:bodyPr rtlCol="0" anchor="ctr"/>
+          <a:lstStyle/>
+          <a:p>
+            <a:pPr algn="ctr"/>
+          </a:p>
+        </p:txBody>
+      </p:sp>
+      <p:sp>
+        <p:nvSpPr>
+          <p:cNvPr id="27" name="TextBox 26"/>
+          <p:cNvSpPr txBox="1"/>
+          <p:nvPr/>
+        </p:nvSpPr>
+        <p:spPr>
+          <a:xfrm>
+            <a:off x="649224" y="3931920"/>
+            <a:ext cx="2057400" cy="484632"/>
+          </a:xfrm>
+          <a:prstGeom prst="rect">
+            <a:avLst/>
+          </a:prstGeom>
+          <a:noFill/>
+        </p:spPr>
+        <p:txBody>
+          <a:bodyPr wrap="square" lIns="0" rIns="0" tIns="0" bIns="0" anchor="ctr">
+            <a:spAutoFit/>
+          </a:bodyPr>
+          <a:lstStyle/>
+          <a:p>
+            <a:pPr algn="l"/>
+            <a:r>
+              <a:rPr sz="1300" b="1">
+                <a:solidFill>
+                  <a:srgbClr val="1C153E"/>
+                </a:solidFill>
+                <a:latin typeface="Calibri"/>
+              </a:rPr>
+              <a:t>Path to production</a:t>
+            </a:r>
+          </a:p>
+        </p:txBody>
+      </p:sp>
+      <p:sp>
+        <p:nvSpPr>
+          <p:cNvPr id="28" name="TextBox 27"/>
+          <p:cNvSpPr txBox="1"/>
+          <p:nvPr/>
+        </p:nvSpPr>
+        <p:spPr>
+          <a:xfrm>
+            <a:off x="2816352" y="3931920"/>
+            <a:ext cx="5422392" cy="484632"/>
+          </a:xfrm>
+          <a:prstGeom prst="rect">
+            <a:avLst/>
+          </a:prstGeom>
+          <a:noFill/>
+        </p:spPr>
+        <p:txBody>
+          <a:bodyPr wrap="square" lIns="0" rIns="0" tIns="0" bIns="0" anchor="ctr">
+            <a:spAutoFit/>
+          </a:bodyPr>
+          <a:lstStyle/>
+          <a:p>
+            <a:pPr algn="l"/>
+            <a:r>
+              <a:rPr sz="1150" b="0">
+                <a:solidFill>
+                  <a:srgbClr val="5D5A72"/>
+                </a:solidFill>
+                <a:latin typeface="Calibri"/>
+              </a:rPr>
+              <a:t>Every gap is a connection, not a rebuild: usage feed → 4 more triggers live; Salesforce → CRM data and meeting triggers; Titan API swaps behind one module.</a:t>
+            </a:r>
+          </a:p>
+        </p:txBody>
+      </p:sp>
+      <p:sp>
+        <p:nvSpPr>
+          <p:cNvPr id="29" name="TextBox 28"/>
+          <p:cNvSpPr txBox="1"/>
+          <p:nvPr/>
+        </p:nvSpPr>
+        <p:spPr>
+          <a:xfrm>
+            <a:off x="411480" y="4590288"/>
+            <a:ext cx="7955279" cy="219456"/>
+          </a:xfrm>
+          <a:prstGeom prst="rect">
+            <a:avLst/>
+          </a:prstGeom>
+          <a:noFill/>
+        </p:spPr>
+        <p:txBody>
+          <a:bodyPr wrap="square" lIns="0" rIns="0" tIns="0" bIns="0" anchor="t">
+            <a:spAutoFit/>
+          </a:bodyPr>
+          <a:lstStyle/>
+          <a:p>
+            <a:pPr algn="l"/>
+            <a:r>
+              <a:rPr sz="850" b="0">
+                <a:solidFill>
+                  <a:srgbClr val="5D5A72"/>
+                </a:solidFill>
+                <a:latin typeface="Calibri"/>
+              </a:rPr>
+              <a:t>ARR per upsell depends on Titan Watch → Titan MAX pricing, which the team should insert before presenting.</a:t>
+            </a:r>
           </a:p>
         </p:txBody>
       </p:sp>
